--- a/cours/Module TIC/Département Français/ENS 2ème année/TD_TIC_ENS_2eme_annee_FR.pptx
+++ b/cours/Module TIC/Département Français/ENS 2ème année/TD_TIC_ENS_2eme_annee_FR.pptx
@@ -15,8 +15,13 @@
     <p:sldId id="263" r:id="rId14"/>
     <p:sldId id="264" r:id="rId15"/>
     <p:sldId id="265" r:id="rId16"/>
+    <p:sldId id="266" r:id="rId17"/>
+    <p:sldId id="267" r:id="rId18"/>
+    <p:sldId id="268" r:id="rId19"/>
+    <p:sldId id="269" r:id="rId20"/>
+    <p:sldId id="270" r:id="rId21"/>
   </p:sldIdLst>
-  <p:sldSz cx="12191695" cy="6858000" type="screen4x3"/>
+  <p:sldSz cx="9144000" cy="6858000" type="screen4x3"/>
   <p:notesSz cx="6858000" cy="9144000"/>
   <p:defaultTextStyle>
     <a:defPPr>
@@ -3090,6 +3095,14 @@
 <file path=ppt/slides/slide1.xml><?xml version="1.0" encoding="utf-8"?>
 <p:sld xmlns:a="http://schemas.openxmlformats.org/drawingml/2006/main" xmlns:p="http://schemas.openxmlformats.org/presentationml/2006/main" xmlns:r="http://schemas.openxmlformats.org/officeDocument/2006/relationships">
   <p:cSld>
+    <p:bg>
+      <p:bgPr>
+        <a:solidFill>
+          <a:srgbClr val="1A5C33"/>
+        </a:solidFill>
+        <a:effectLst/>
+      </p:bgPr>
+    </p:bg>
     <p:spTree>
       <p:nvGrpSpPr>
         <p:cNvPr id="1" name=""/>
@@ -3099,56 +3112,14 @@
       <p:grpSpPr/>
       <p:sp>
         <p:nvSpPr>
-          <p:cNvPr id="2" name="Title 1"/>
-          <p:cNvSpPr>
-            <a:spLocks noGrp="1"/>
-          </p:cNvSpPr>
-          <p:nvPr>
-            <p:ph type="ctrTitle"/>
-          </p:nvPr>
-        </p:nvSpPr>
-        <p:spPr/>
-        <p:txBody>
-          <a:bodyPr/>
-          <a:lstStyle/>
-          <a:p>
-            <a:r>
-              <a:t>TD TIC — ENS 2ème année</a:t>
-            </a:r>
-          </a:p>
-        </p:txBody>
-      </p:sp>
-      <p:sp>
-        <p:nvSpPr>
-          <p:cNvPr id="3" name="Subtitle 2"/>
-          <p:cNvSpPr>
-            <a:spLocks noGrp="1"/>
-          </p:cNvSpPr>
-          <p:nvPr>
-            <p:ph type="subTitle" idx="1"/>
-          </p:nvPr>
-        </p:nvSpPr>
-        <p:spPr/>
-        <p:txBody>
-          <a:bodyPr/>
-          <a:lstStyle/>
-          <a:p>
-            <a:r>
-              <a:t>Durée : 1h30 | BELACEL Madani</a:t>
-            </a:r>
-          </a:p>
-        </p:txBody>
-      </p:sp>
-      <p:sp>
-        <p:nvSpPr>
-          <p:cNvPr id="4" name="TextBox 3"/>
+          <p:cNvPr id="2" name="TextBox 1"/>
           <p:cNvSpPr txBox="1"/>
           <p:nvPr/>
         </p:nvSpPr>
         <p:spPr>
           <a:xfrm>
-            <a:off x="365760" y="6446520"/>
-            <a:ext cx="8412480" cy="320040"/>
+            <a:off x="731520" y="1371600"/>
+            <a:ext cx="7680960" cy="1371600"/>
           </a:xfrm>
           <a:prstGeom prst="rect">
             <a:avLst/>
@@ -3156,20 +3127,90 @@
           <a:noFill/>
         </p:spPr>
         <p:txBody>
-          <a:bodyPr wrap="none">
+          <a:bodyPr wrap="square">
             <a:spAutoFit/>
           </a:bodyPr>
           <a:lstStyle/>
           <a:p>
             <a:pPr algn="ctr">
-              <a:defRPr sz="900">
-                <a:solidFill>
-                  <a:srgbClr val="404040"/>
-                </a:solidFill>
-              </a:defRPr>
-            </a:pPr>
-            <a:r>
-              <a:t>TD TIC — ENS 2ème année — Module Langues  •  Diapositive 1/10</a:t>
+              <a:defRPr sz="3200" b="1">
+                <a:solidFill>
+                  <a:srgbClr val="FFFFFF"/>
+                </a:solidFill>
+              </a:defRPr>
+            </a:pPr>
+            <a:r>
+              <a:t>TD TIC 01 — Introduction aux Techniques de l'Information et de la Communication</a:t>
+            </a:r>
+          </a:p>
+        </p:txBody>
+      </p:sp>
+      <p:sp>
+        <p:nvSpPr>
+          <p:cNvPr id="3" name="TextBox 2"/>
+          <p:cNvSpPr txBox="1"/>
+          <p:nvPr/>
+        </p:nvSpPr>
+        <p:spPr>
+          <a:xfrm>
+            <a:off x="731520" y="2926080"/>
+            <a:ext cx="7680960" cy="548640"/>
+          </a:xfrm>
+          <a:prstGeom prst="rect">
+            <a:avLst/>
+          </a:prstGeom>
+          <a:noFill/>
+        </p:spPr>
+        <p:txBody>
+          <a:bodyPr wrap="square">
+            <a:spAutoFit/>
+          </a:bodyPr>
+          <a:lstStyle/>
+          <a:p>
+            <a:pPr algn="ctr">
+              <a:defRPr sz="2000" b="0">
+                <a:solidFill>
+                  <a:srgbClr val="C5D9C7"/>
+                </a:solidFill>
+              </a:defRPr>
+            </a:pPr>
+            <a:r>
+              <a:t>Module TIC — Dr. BELACEL Madani</a:t>
+            </a:r>
+          </a:p>
+        </p:txBody>
+      </p:sp>
+      <p:sp>
+        <p:nvSpPr>
+          <p:cNvPr id="4" name="TextBox 3"/>
+          <p:cNvSpPr txBox="1"/>
+          <p:nvPr/>
+        </p:nvSpPr>
+        <p:spPr>
+          <a:xfrm>
+            <a:off x="731520" y="3657600"/>
+            <a:ext cx="7680960" cy="457200"/>
+          </a:xfrm>
+          <a:prstGeom prst="rect">
+            <a:avLst/>
+          </a:prstGeom>
+          <a:noFill/>
+        </p:spPr>
+        <p:txBody>
+          <a:bodyPr wrap="square">
+            <a:spAutoFit/>
+          </a:bodyPr>
+          <a:lstStyle/>
+          <a:p>
+            <a:pPr algn="ctr">
+              <a:defRPr sz="1600" b="0">
+                <a:solidFill>
+                  <a:srgbClr val="A0CFA0"/>
+                </a:solidFill>
+              </a:defRPr>
+            </a:pPr>
+            <a:r>
+              <a:t>Université de Mostaganem — MCB</a:t>
             </a:r>
           </a:p>
         </p:txBody>
@@ -3179,15 +3220,20 @@
   <p:clrMapOvr>
     <a:masterClrMapping/>
   </p:clrMapOvr>
-  <p:transition spd="med">
-    <p:fade/>
-  </p:transition>
 </p:sld>
 </file>
 
 <file path=ppt/slides/slide10.xml><?xml version="1.0" encoding="utf-8"?>
 <p:sld xmlns:a="http://schemas.openxmlformats.org/drawingml/2006/main" xmlns:p="http://schemas.openxmlformats.org/presentationml/2006/main" xmlns:r="http://schemas.openxmlformats.org/officeDocument/2006/relationships">
   <p:cSld>
+    <p:bg>
+      <p:bgPr>
+        <a:solidFill>
+          <a:srgbClr val="FFFFFF"/>
+        </a:solidFill>
+        <a:effectLst/>
+      </p:bgPr>
+    </p:bg>
     <p:spTree>
       <p:nvGrpSpPr>
         <p:cNvPr id="1" name=""/>
@@ -3197,67 +3243,57 @@
       <p:grpSpPr/>
       <p:sp>
         <p:nvSpPr>
-          <p:cNvPr id="2" name="Title 1"/>
-          <p:cNvSpPr>
-            <a:spLocks noGrp="1"/>
-          </p:cNvSpPr>
-          <p:nvPr>
-            <p:ph type="title"/>
-          </p:nvPr>
-        </p:nvSpPr>
-        <p:spPr/>
-        <p:txBody>
-          <a:bodyPr/>
-          <a:lstStyle/>
-          <a:p>
-            <a:r>
-              <a:t>Fin du TD</a:t>
-            </a:r>
-          </a:p>
-        </p:txBody>
-      </p:sp>
-      <p:sp>
-        <p:nvSpPr>
-          <p:cNvPr id="3" name="Content Placeholder 2"/>
-          <p:cNvSpPr>
-            <a:spLocks noGrp="1"/>
-          </p:cNvSpPr>
-          <p:nvPr>
-            <p:ph idx="1"/>
-          </p:nvPr>
-        </p:nvSpPr>
-        <p:spPr/>
-        <p:txBody>
-          <a:bodyPr/>
-          <a:lstStyle/>
-          <a:p>
-            <a:pPr>
-              <a:defRPr sz="2000"/>
-            </a:pPr>
-            <a:r>
-              <a:t>✅ Correction collective</a:t>
-            </a:r>
-          </a:p>
-          <a:p>
-            <a:pPr>
-              <a:defRPr sz="2000"/>
-            </a:pPr>
-            <a:r>
-              <a:t>✅ Questions ?</a:t>
-            </a:r>
-          </a:p>
-        </p:txBody>
-      </p:sp>
-      <p:sp>
-        <p:nvSpPr>
-          <p:cNvPr id="4" name="TextBox 3"/>
+          <p:cNvPr id="2" name="Rectangle 1"/>
+          <p:cNvSpPr/>
+          <p:nvPr/>
+        </p:nvSpPr>
+        <p:spPr>
+          <a:xfrm>
+            <a:off x="0" y="0"/>
+            <a:ext cx="109728" cy="6858000"/>
+          </a:xfrm>
+          <a:prstGeom prst="rect">
+            <a:avLst/>
+          </a:prstGeom>
+          <a:solidFill>
+            <a:srgbClr val="2C6E49"/>
+          </a:solidFill>
+          <a:ln>
+            <a:noFill/>
+          </a:ln>
+        </p:spPr>
+        <p:style>
+          <a:lnRef idx="1">
+            <a:schemeClr val="accent1"/>
+          </a:lnRef>
+          <a:fillRef idx="3">
+            <a:schemeClr val="accent1"/>
+          </a:fillRef>
+          <a:effectRef idx="2">
+            <a:schemeClr val="accent1"/>
+          </a:effectRef>
+          <a:fontRef idx="minor">
+            <a:schemeClr val="lt1"/>
+          </a:fontRef>
+        </p:style>
+        <p:txBody>
+          <a:bodyPr rtlCol="0" anchor="ctr"/>
+          <a:lstStyle/>
+          <a:p>
+            <a:pPr algn="ctr"/>
+          </a:p>
+        </p:txBody>
+      </p:sp>
+      <p:sp>
+        <p:nvSpPr>
+          <p:cNvPr id="3" name="TextBox 2"/>
           <p:cNvSpPr txBox="1"/>
           <p:nvPr/>
         </p:nvSpPr>
         <p:spPr>
           <a:xfrm>
-            <a:off x="365760" y="6446520"/>
-            <a:ext cx="8412480" cy="320040"/>
+            <a:off x="457200" y="365760"/>
+            <a:ext cx="8229600" cy="640080"/>
           </a:xfrm>
           <a:prstGeom prst="rect">
             <a:avLst/>
@@ -3265,20 +3301,73 @@
           <a:noFill/>
         </p:spPr>
         <p:txBody>
-          <a:bodyPr wrap="none">
+          <a:bodyPr wrap="square">
             <a:spAutoFit/>
           </a:bodyPr>
           <a:lstStyle/>
           <a:p>
-            <a:pPr algn="ctr">
-              <a:defRPr sz="900">
-                <a:solidFill>
-                  <a:srgbClr val="404040"/>
-                </a:solidFill>
-              </a:defRPr>
-            </a:pPr>
-            <a:r>
-              <a:t>TD TIC — ENS 2ème année — Module Langues  •  Diapositive 10/10</a:t>
+            <a:pPr algn="l">
+              <a:defRPr sz="2200" b="1">
+                <a:solidFill>
+                  <a:srgbClr val="1A5C33"/>
+                </a:solidFill>
+              </a:defRPr>
+            </a:pPr>
+            <a:r>
+              <a:t>Exercice 2 — Entrée / Traitement / Sortie(15 min)</a:t>
+            </a:r>
+          </a:p>
+        </p:txBody>
+      </p:sp>
+      <p:sp>
+        <p:nvSpPr>
+          <p:cNvPr id="4" name="TextBox 3"/>
+          <p:cNvSpPr txBox="1"/>
+          <p:nvPr/>
+        </p:nvSpPr>
+        <p:spPr>
+          <a:xfrm>
+            <a:off x="457200" y="1371600"/>
+            <a:ext cx="7772400" cy="4572000"/>
+          </a:xfrm>
+          <a:prstGeom prst="rect">
+            <a:avLst/>
+          </a:prstGeom>
+          <a:noFill/>
+        </p:spPr>
+        <p:txBody>
+          <a:bodyPr wrap="square">
+            <a:spAutoFit/>
+          </a:bodyPr>
+          <a:lstStyle/>
+          <a:p>
+            <a:pPr>
+              <a:spcAft>
+                <a:spcPts val="600"/>
+              </a:spcAft>
+              <a:defRPr sz="1400">
+                <a:solidFill>
+                  <a:srgbClr val="222222"/>
+                </a:solidFill>
+              </a:defRPr>
+            </a:pPr>
+            <a:r>
+              <a:t>• Énoncé :Classez : clavier, écran, processeur, imprimante, micro, disque dur.</a:t>
+            </a:r>
+          </a:p>
+          <a:p>
+            <a:pPr>
+              <a:spcAft>
+                <a:spcPts val="600"/>
+              </a:spcAft>
+              <a:defRPr sz="1400">
+                <a:solidFill>
+                  <a:srgbClr val="222222"/>
+                </a:solidFill>
+              </a:defRPr>
+            </a:pPr>
+            <a:r>
+              <a:t>• Corrigé :Entrée : clavier, micro ; Traitement : processeur ; Sortie : écran, imprimante ; Stockage : disque dur.</a:t>
             </a:r>
           </a:p>
         </p:txBody>
@@ -3288,15 +3377,20 @@
   <p:clrMapOvr>
     <a:masterClrMapping/>
   </p:clrMapOvr>
-  <p:transition spd="med">
-    <p:fade/>
-  </p:transition>
 </p:sld>
 </file>
 
-<file path=ppt/slides/slide2.xml><?xml version="1.0" encoding="utf-8"?>
+<file path=ppt/slides/slide11.xml><?xml version="1.0" encoding="utf-8"?>
 <p:sld xmlns:a="http://schemas.openxmlformats.org/drawingml/2006/main" xmlns:p="http://schemas.openxmlformats.org/presentationml/2006/main" xmlns:r="http://schemas.openxmlformats.org/officeDocument/2006/relationships">
   <p:cSld>
+    <p:bg>
+      <p:bgPr>
+        <a:solidFill>
+          <a:srgbClr val="FFFFFF"/>
+        </a:solidFill>
+        <a:effectLst/>
+      </p:bgPr>
+    </p:bg>
     <p:spTree>
       <p:nvGrpSpPr>
         <p:cNvPr id="1" name=""/>
@@ -3306,91 +3400,57 @@
       <p:grpSpPr/>
       <p:sp>
         <p:nvSpPr>
-          <p:cNvPr id="2" name="Title 1"/>
-          <p:cNvSpPr>
-            <a:spLocks noGrp="1"/>
-          </p:cNvSpPr>
-          <p:nvPr>
-            <p:ph type="title"/>
-          </p:nvPr>
-        </p:nvSpPr>
-        <p:spPr/>
-        <p:txBody>
-          <a:bodyPr/>
-          <a:lstStyle/>
-          <a:p>
-            <a:r>
-              <a:t>Déroulement TD</a:t>
-            </a:r>
-          </a:p>
-        </p:txBody>
-      </p:sp>
-      <p:sp>
-        <p:nvSpPr>
-          <p:cNvPr id="3" name="Content Placeholder 2"/>
-          <p:cNvSpPr>
-            <a:spLocks noGrp="1"/>
-          </p:cNvSpPr>
-          <p:nvPr>
-            <p:ph idx="1"/>
-          </p:nvPr>
-        </p:nvSpPr>
-        <p:spPr/>
-        <p:txBody>
-          <a:bodyPr/>
-          <a:lstStyle/>
-          <a:p>
-            <a:pPr>
-              <a:defRPr sz="2000"/>
-            </a:pPr>
-            <a:r>
-              <a:t>⏱️ Ex.1 Analyse 15'</a:t>
-            </a:r>
-          </a:p>
-          <a:p>
-            <a:pPr>
-              <a:defRPr sz="2000"/>
-            </a:pPr>
-            <a:r>
-              <a:t>⏱️ Ex.2 Scénario 18'</a:t>
-            </a:r>
-          </a:p>
-          <a:p>
-            <a:pPr>
-              <a:defRPr sz="2000"/>
-            </a:pPr>
-            <a:r>
-              <a:t>⏱️ Ex.3 Moodle 18'</a:t>
-            </a:r>
-          </a:p>
-          <a:p>
-            <a:pPr>
-              <a:defRPr sz="2000"/>
-            </a:pPr>
-            <a:r>
-              <a:t>⏱️ Ex.4 Portfolio 18'</a:t>
-            </a:r>
-          </a:p>
-          <a:p>
-            <a:pPr>
-              <a:defRPr sz="2000"/>
-            </a:pPr>
-            <a:r>
-              <a:t>⏱️ Ex.5 Charte IA 16'</a:t>
-            </a:r>
-          </a:p>
-        </p:txBody>
-      </p:sp>
-      <p:sp>
-        <p:nvSpPr>
-          <p:cNvPr id="4" name="TextBox 3"/>
+          <p:cNvPr id="2" name="Rectangle 1"/>
+          <p:cNvSpPr/>
+          <p:nvPr/>
+        </p:nvSpPr>
+        <p:spPr>
+          <a:xfrm>
+            <a:off x="0" y="0"/>
+            <a:ext cx="109728" cy="6858000"/>
+          </a:xfrm>
+          <a:prstGeom prst="rect">
+            <a:avLst/>
+          </a:prstGeom>
+          <a:solidFill>
+            <a:srgbClr val="2C6E49"/>
+          </a:solidFill>
+          <a:ln>
+            <a:noFill/>
+          </a:ln>
+        </p:spPr>
+        <p:style>
+          <a:lnRef idx="1">
+            <a:schemeClr val="accent1"/>
+          </a:lnRef>
+          <a:fillRef idx="3">
+            <a:schemeClr val="accent1"/>
+          </a:fillRef>
+          <a:effectRef idx="2">
+            <a:schemeClr val="accent1"/>
+          </a:effectRef>
+          <a:fontRef idx="minor">
+            <a:schemeClr val="lt1"/>
+          </a:fontRef>
+        </p:style>
+        <p:txBody>
+          <a:bodyPr rtlCol="0" anchor="ctr"/>
+          <a:lstStyle/>
+          <a:p>
+            <a:pPr algn="ctr"/>
+          </a:p>
+        </p:txBody>
+      </p:sp>
+      <p:sp>
+        <p:nvSpPr>
+          <p:cNvPr id="3" name="TextBox 2"/>
           <p:cNvSpPr txBox="1"/>
           <p:nvPr/>
         </p:nvSpPr>
         <p:spPr>
           <a:xfrm>
-            <a:off x="365760" y="6446520"/>
-            <a:ext cx="8412480" cy="320040"/>
+            <a:off x="457200" y="365760"/>
+            <a:ext cx="8229600" cy="640080"/>
           </a:xfrm>
           <a:prstGeom prst="rect">
             <a:avLst/>
@@ -3398,20 +3458,73 @@
           <a:noFill/>
         </p:spPr>
         <p:txBody>
-          <a:bodyPr wrap="none">
+          <a:bodyPr wrap="square">
             <a:spAutoFit/>
           </a:bodyPr>
           <a:lstStyle/>
           <a:p>
-            <a:pPr algn="ctr">
-              <a:defRPr sz="900">
-                <a:solidFill>
-                  <a:srgbClr val="404040"/>
-                </a:solidFill>
-              </a:defRPr>
-            </a:pPr>
-            <a:r>
-              <a:t>TD TIC — ENS 2ème année — Module Langues  •  Diapositive 2/10</a:t>
+            <a:pPr algn="l">
+              <a:defRPr sz="2200" b="1">
+                <a:solidFill>
+                  <a:srgbClr val="1A5C33"/>
+                </a:solidFill>
+              </a:defRPr>
+            </a:pPr>
+            <a:r>
+              <a:t>Exercice 3 — RAM vs stockage(18 min)</a:t>
+            </a:r>
+          </a:p>
+        </p:txBody>
+      </p:sp>
+      <p:sp>
+        <p:nvSpPr>
+          <p:cNvPr id="4" name="TextBox 3"/>
+          <p:cNvSpPr txBox="1"/>
+          <p:nvPr/>
+        </p:nvSpPr>
+        <p:spPr>
+          <a:xfrm>
+            <a:off x="457200" y="1371600"/>
+            <a:ext cx="7772400" cy="4572000"/>
+          </a:xfrm>
+          <a:prstGeom prst="rect">
+            <a:avLst/>
+          </a:prstGeom>
+          <a:noFill/>
+        </p:spPr>
+        <p:txBody>
+          <a:bodyPr wrap="square">
+            <a:spAutoFit/>
+          </a:bodyPr>
+          <a:lstStyle/>
+          <a:p>
+            <a:pPr>
+              <a:spcAft>
+                <a:spcPts val="600"/>
+              </a:spcAft>
+              <a:defRPr sz="1400">
+                <a:solidFill>
+                  <a:srgbClr val="222222"/>
+                </a:solidFill>
+              </a:defRPr>
+            </a:pPr>
+            <a:r>
+              <a:t>• Énoncé :Pourquoi un document non sauvegardé disparaît-il après une coupure de courant ?</a:t>
+            </a:r>
+          </a:p>
+          <a:p>
+            <a:pPr>
+              <a:spcAft>
+                <a:spcPts val="600"/>
+              </a:spcAft>
+              <a:defRPr sz="1400">
+                <a:solidFill>
+                  <a:srgbClr val="222222"/>
+                </a:solidFill>
+              </a:defRPr>
+            </a:pPr>
+            <a:r>
+              <a:t>• Corrigé :Les données en cours d'édition sont en RAM (volatile). Sans enregistrement sur disque/SSD/cloud, elles sont perdues à l'arrêt.</a:t>
             </a:r>
           </a:p>
         </p:txBody>
@@ -3421,15 +3534,20 @@
   <p:clrMapOvr>
     <a:masterClrMapping/>
   </p:clrMapOvr>
-  <p:transition spd="med">
-    <p:fade/>
-  </p:transition>
 </p:sld>
 </file>
 
-<file path=ppt/slides/slide3.xml><?xml version="1.0" encoding="utf-8"?>
+<file path=ppt/slides/slide12.xml><?xml version="1.0" encoding="utf-8"?>
 <p:sld xmlns:a="http://schemas.openxmlformats.org/drawingml/2006/main" xmlns:p="http://schemas.openxmlformats.org/presentationml/2006/main" xmlns:r="http://schemas.openxmlformats.org/officeDocument/2006/relationships">
   <p:cSld>
+    <p:bg>
+      <p:bgPr>
+        <a:solidFill>
+          <a:srgbClr val="FFFFFF"/>
+        </a:solidFill>
+        <a:effectLst/>
+      </p:bgPr>
+    </p:bg>
     <p:spTree>
       <p:nvGrpSpPr>
         <p:cNvPr id="1" name=""/>
@@ -3439,67 +3557,57 @@
       <p:grpSpPr/>
       <p:sp>
         <p:nvSpPr>
-          <p:cNvPr id="2" name="Title 1"/>
-          <p:cNvSpPr>
-            <a:spLocks noGrp="1"/>
-          </p:cNvSpPr>
-          <p:nvPr>
-            <p:ph type="title"/>
-          </p:nvPr>
-        </p:nvSpPr>
-        <p:spPr/>
-        <p:txBody>
-          <a:bodyPr/>
-          <a:lstStyle/>
-          <a:p>
-            <a:r>
-              <a:t>Exercice 1</a:t>
-            </a:r>
-          </a:p>
-        </p:txBody>
-      </p:sp>
-      <p:sp>
-        <p:nvSpPr>
-          <p:cNvPr id="3" name="Content Placeholder 2"/>
-          <p:cNvSpPr>
-            <a:spLocks noGrp="1"/>
-          </p:cNvSpPr>
-          <p:nvPr>
-            <p:ph idx="1"/>
-          </p:nvPr>
-        </p:nvSpPr>
-        <p:spPr/>
-        <p:txBody>
-          <a:bodyPr/>
-          <a:lstStyle/>
-          <a:p>
-            <a:pPr>
-              <a:defRPr sz="2000"/>
-            </a:pPr>
-            <a:r>
-              <a:t>1️⃣ Grille séquence stage</a:t>
-            </a:r>
-          </a:p>
-          <a:p>
-            <a:pPr>
-              <a:defRPr sz="2000"/>
-            </a:pPr>
-            <a:r>
-              <a:t>1️⃣ Améliorations num.</a:t>
-            </a:r>
-          </a:p>
-        </p:txBody>
-      </p:sp>
-      <p:sp>
-        <p:nvSpPr>
-          <p:cNvPr id="4" name="TextBox 3"/>
+          <p:cNvPr id="2" name="Rectangle 1"/>
+          <p:cNvSpPr/>
+          <p:nvPr/>
+        </p:nvSpPr>
+        <p:spPr>
+          <a:xfrm>
+            <a:off x="0" y="0"/>
+            <a:ext cx="109728" cy="6858000"/>
+          </a:xfrm>
+          <a:prstGeom prst="rect">
+            <a:avLst/>
+          </a:prstGeom>
+          <a:solidFill>
+            <a:srgbClr val="2C6E49"/>
+          </a:solidFill>
+          <a:ln>
+            <a:noFill/>
+          </a:ln>
+        </p:spPr>
+        <p:style>
+          <a:lnRef idx="1">
+            <a:schemeClr val="accent1"/>
+          </a:lnRef>
+          <a:fillRef idx="3">
+            <a:schemeClr val="accent1"/>
+          </a:fillRef>
+          <a:effectRef idx="2">
+            <a:schemeClr val="accent1"/>
+          </a:effectRef>
+          <a:fontRef idx="minor">
+            <a:schemeClr val="lt1"/>
+          </a:fontRef>
+        </p:style>
+        <p:txBody>
+          <a:bodyPr rtlCol="0" anchor="ctr"/>
+          <a:lstStyle/>
+          <a:p>
+            <a:pPr algn="ctr"/>
+          </a:p>
+        </p:txBody>
+      </p:sp>
+      <p:sp>
+        <p:nvSpPr>
+          <p:cNvPr id="3" name="TextBox 2"/>
           <p:cNvSpPr txBox="1"/>
           <p:nvPr/>
         </p:nvSpPr>
         <p:spPr>
           <a:xfrm>
-            <a:off x="365760" y="6446520"/>
-            <a:ext cx="8412480" cy="320040"/>
+            <a:off x="457200" y="365760"/>
+            <a:ext cx="8229600" cy="640080"/>
           </a:xfrm>
           <a:prstGeom prst="rect">
             <a:avLst/>
@@ -3507,20 +3615,73 @@
           <a:noFill/>
         </p:spPr>
         <p:txBody>
-          <a:bodyPr wrap="none">
+          <a:bodyPr wrap="square">
             <a:spAutoFit/>
           </a:bodyPr>
           <a:lstStyle/>
           <a:p>
-            <a:pPr algn="ctr">
-              <a:defRPr sz="900">
-                <a:solidFill>
-                  <a:srgbClr val="404040"/>
-                </a:solidFill>
-              </a:defRPr>
-            </a:pPr>
-            <a:r>
-              <a:t>TD TIC — ENS 2ème année — Module Langues  •  Diapositive 3/10</a:t>
+            <a:pPr algn="l">
+              <a:defRPr sz="2200" b="1">
+                <a:solidFill>
+                  <a:srgbClr val="1A5C33"/>
+                </a:solidFill>
+              </a:defRPr>
+            </a:pPr>
+            <a:r>
+              <a:t>Exercice 4 — Choix de support(18 min)</a:t>
+            </a:r>
+          </a:p>
+        </p:txBody>
+      </p:sp>
+      <p:sp>
+        <p:nvSpPr>
+          <p:cNvPr id="4" name="TextBox 3"/>
+          <p:cNvSpPr txBox="1"/>
+          <p:nvPr/>
+        </p:nvSpPr>
+        <p:spPr>
+          <a:xfrm>
+            <a:off x="457200" y="1371600"/>
+            <a:ext cx="7772400" cy="4572000"/>
+          </a:xfrm>
+          <a:prstGeom prst="rect">
+            <a:avLst/>
+          </a:prstGeom>
+          <a:noFill/>
+        </p:spPr>
+        <p:txBody>
+          <a:bodyPr wrap="square">
+            <a:spAutoFit/>
+          </a:bodyPr>
+          <a:lstStyle/>
+          <a:p>
+            <a:pPr>
+              <a:spcAft>
+                <a:spcPts val="600"/>
+              </a:spcAft>
+              <a:defRPr sz="1400">
+                <a:solidFill>
+                  <a:srgbClr val="222222"/>
+                </a:solidFill>
+              </a:defRPr>
+            </a:pPr>
+            <a:r>
+              <a:t>• Énoncé :Pour travail quotidien, archive longue durée, transport de fichiers — recommandez un support et justifiez.</a:t>
+            </a:r>
+          </a:p>
+          <a:p>
+            <a:pPr>
+              <a:spcAft>
+                <a:spcPts val="600"/>
+              </a:spcAft>
+              <a:defRPr sz="1400">
+                <a:solidFill>
+                  <a:srgbClr val="222222"/>
+                </a:solidFill>
+              </a:defRPr>
+            </a:pPr>
+            <a:r>
+              <a:t>• Corrigé :SSD pour usage quotidien ; HDD ou cloud pour archives ; clé USB pour transport ponctuel.</a:t>
             </a:r>
           </a:p>
         </p:txBody>
@@ -3530,15 +3691,20 @@
   <p:clrMapOvr>
     <a:masterClrMapping/>
   </p:clrMapOvr>
-  <p:transition spd="med">
-    <p:fade/>
-  </p:transition>
 </p:sld>
 </file>
 
-<file path=ppt/slides/slide4.xml><?xml version="1.0" encoding="utf-8"?>
+<file path=ppt/slides/slide13.xml><?xml version="1.0" encoding="utf-8"?>
 <p:sld xmlns:a="http://schemas.openxmlformats.org/drawingml/2006/main" xmlns:p="http://schemas.openxmlformats.org/presentationml/2006/main" xmlns:r="http://schemas.openxmlformats.org/officeDocument/2006/relationships">
   <p:cSld>
+    <p:bg>
+      <p:bgPr>
+        <a:solidFill>
+          <a:srgbClr val="E8F0E9"/>
+        </a:solidFill>
+        <a:effectLst/>
+      </p:bgPr>
+    </p:bg>
     <p:spTree>
       <p:nvGrpSpPr>
         <p:cNvPr id="1" name=""/>
@@ -3548,75 +3714,14 @@
       <p:grpSpPr/>
       <p:sp>
         <p:nvSpPr>
-          <p:cNvPr id="2" name="Title 1"/>
-          <p:cNvSpPr>
-            <a:spLocks noGrp="1"/>
-          </p:cNvSpPr>
-          <p:nvPr>
-            <p:ph type="title"/>
-          </p:nvPr>
-        </p:nvSpPr>
-        <p:spPr/>
-        <p:txBody>
-          <a:bodyPr/>
-          <a:lstStyle/>
-          <a:p>
-            <a:r>
-              <a:t>Exercice 2</a:t>
-            </a:r>
-          </a:p>
-        </p:txBody>
-      </p:sp>
-      <p:sp>
-        <p:nvSpPr>
-          <p:cNvPr id="3" name="Content Placeholder 2"/>
-          <p:cNvSpPr>
-            <a:spLocks noGrp="1"/>
-          </p:cNvSpPr>
-          <p:nvPr>
-            <p:ph idx="1"/>
-          </p:nvPr>
-        </p:nvSpPr>
-        <p:spPr/>
-        <p:txBody>
-          <a:bodyPr/>
-          <a:lstStyle/>
-          <a:p>
-            <a:pPr>
-              <a:defRPr sz="2000"/>
-            </a:pPr>
-            <a:r>
-              <a:t>2️⃣ 3×45 min B1</a:t>
-            </a:r>
-          </a:p>
-          <a:p>
-            <a:pPr>
-              <a:defRPr sz="2000"/>
-            </a:pPr>
-            <a:r>
-              <a:t>2️⃣ Argumentation</a:t>
-            </a:r>
-          </a:p>
-          <a:p>
-            <a:pPr>
-              <a:defRPr sz="2000"/>
-            </a:pPr>
-            <a:r>
-              <a:t>2️⃣ Différenciation</a:t>
-            </a:r>
-          </a:p>
-        </p:txBody>
-      </p:sp>
-      <p:sp>
-        <p:nvSpPr>
-          <p:cNvPr id="4" name="TextBox 3"/>
+          <p:cNvPr id="2" name="TextBox 1"/>
           <p:cNvSpPr txBox="1"/>
           <p:nvPr/>
         </p:nvSpPr>
         <p:spPr>
           <a:xfrm>
-            <a:off x="365760" y="6446520"/>
-            <a:ext cx="8412480" cy="320040"/>
+            <a:off x="548640" y="365760"/>
+            <a:ext cx="7772400" cy="640080"/>
           </a:xfrm>
           <a:prstGeom prst="rect">
             <a:avLst/>
@@ -3624,20 +3729,122 @@
           <a:noFill/>
         </p:spPr>
         <p:txBody>
-          <a:bodyPr wrap="none">
+          <a:bodyPr wrap="square">
             <a:spAutoFit/>
           </a:bodyPr>
           <a:lstStyle/>
           <a:p>
             <a:pPr algn="ctr">
-              <a:defRPr sz="900">
-                <a:solidFill>
-                  <a:srgbClr val="404040"/>
-                </a:solidFill>
-              </a:defRPr>
-            </a:pPr>
-            <a:r>
-              <a:t>TD TIC — ENS 2ème année — Module Langues  •  Diapositive 4/10</a:t>
+              <a:defRPr sz="2600" b="1">
+                <a:solidFill>
+                  <a:srgbClr val="1A5C33"/>
+                </a:solidFill>
+              </a:defRPr>
+            </a:pPr>
+            <a:r>
+              <a:t>📝 Points clés à retenir</a:t>
+            </a:r>
+          </a:p>
+        </p:txBody>
+      </p:sp>
+      <p:sp>
+        <p:nvSpPr>
+          <p:cNvPr id="3" name="TextBox 2"/>
+          <p:cNvSpPr txBox="1"/>
+          <p:nvPr/>
+        </p:nvSpPr>
+        <p:spPr>
+          <a:xfrm>
+            <a:off x="548640" y="1828800"/>
+            <a:ext cx="7772400" cy="4572000"/>
+          </a:xfrm>
+          <a:prstGeom prst="rect">
+            <a:avLst/>
+          </a:prstGeom>
+          <a:noFill/>
+        </p:spPr>
+        <p:txBody>
+          <a:bodyPr wrap="square">
+            <a:spAutoFit/>
+          </a:bodyPr>
+          <a:lstStyle/>
+          <a:p>
+            <a:pPr>
+              <a:spcAft>
+                <a:spcPts val="600"/>
+              </a:spcAft>
+              <a:defRPr sz="1600">
+                <a:solidFill>
+                  <a:srgbClr val="222222"/>
+                </a:solidFill>
+              </a:defRPr>
+            </a:pPr>
+            <a:r>
+              <a:t>• Énoncé :Donnez votre propre définition des TIC en 2-3 lignes, puis comparez-la à la définition UIT.</a:t>
+            </a:r>
+          </a:p>
+          <a:p>
+            <a:pPr>
+              <a:spcAft>
+                <a:spcPts val="600"/>
+              </a:spcAft>
+              <a:defRPr sz="1600">
+                <a:solidFill>
+                  <a:srgbClr val="222222"/>
+                </a:solidFill>
+              </a:defRPr>
+            </a:pPr>
+            <a:r>
+              <a:t>• Énoncé :Expliquez avec des exemples personnels les trois dimensions : Techniques, Information, Communication.</a:t>
+            </a:r>
+          </a:p>
+          <a:p>
+            <a:pPr>
+              <a:spcAft>
+                <a:spcPts val="600"/>
+              </a:spcAft>
+              <a:defRPr sz="1600">
+                <a:solidFill>
+                  <a:srgbClr val="222222"/>
+                </a:solidFill>
+              </a:defRPr>
+            </a:pPr>
+            <a:r>
+              <a:t>• Énoncé :Pour chaque action, identifiez la fonction : traitement / transmission / sauvegarde.</a:t>
+            </a:r>
+            <a:br/>
+            <a:r>
+              <a:t>Rédaction Word, envoi email, copie USB, visioconférence Teams, impression PDF.</a:t>
+            </a:r>
+          </a:p>
+          <a:p>
+            <a:pPr>
+              <a:spcAft>
+                <a:spcPts val="600"/>
+              </a:spcAft>
+              <a:defRPr sz="1600">
+                <a:solidFill>
+                  <a:srgbClr val="222222"/>
+                </a:solidFill>
+              </a:defRPr>
+            </a:pPr>
+            <a:r>
+              <a:t>• Énoncé :Citez 5 usages concrets des TIC pour un étudiant en langues étrangères.</a:t>
+            </a:r>
+          </a:p>
+          <a:p>
+            <a:pPr>
+              <a:spcAft>
+                <a:spcPts val="600"/>
+              </a:spcAft>
+              <a:defRPr sz="1600">
+                <a:solidFill>
+                  <a:srgbClr val="222222"/>
+                </a:solidFill>
+              </a:defRPr>
+            </a:pPr>
+            <a:r>
+              <a:t>• Énoncé :Rédigez un paragraphe (10-12 lignes) sur opportunités et risques des TIC pour les étudiants en langues.</a:t>
             </a:r>
           </a:p>
         </p:txBody>
@@ -3647,15 +3854,20 @@
   <p:clrMapOvr>
     <a:masterClrMapping/>
   </p:clrMapOvr>
-  <p:transition spd="med">
-    <p:fade/>
-  </p:transition>
 </p:sld>
 </file>
 
-<file path=ppt/slides/slide5.xml><?xml version="1.0" encoding="utf-8"?>
+<file path=ppt/slides/slide14.xml><?xml version="1.0" encoding="utf-8"?>
 <p:sld xmlns:a="http://schemas.openxmlformats.org/drawingml/2006/main" xmlns:p="http://schemas.openxmlformats.org/presentationml/2006/main" xmlns:r="http://schemas.openxmlformats.org/officeDocument/2006/relationships">
   <p:cSld>
+    <p:bg>
+      <p:bgPr>
+        <a:solidFill>
+          <a:srgbClr val="FFFFFF"/>
+        </a:solidFill>
+        <a:effectLst/>
+      </p:bgPr>
+    </p:bg>
     <p:spTree>
       <p:nvGrpSpPr>
         <p:cNvPr id="1" name=""/>
@@ -3665,67 +3877,14 @@
       <p:grpSpPr/>
       <p:sp>
         <p:nvSpPr>
-          <p:cNvPr id="2" name="Title 1"/>
-          <p:cNvSpPr>
-            <a:spLocks noGrp="1"/>
-          </p:cNvSpPr>
-          <p:nvPr>
-            <p:ph type="title"/>
-          </p:nvPr>
-        </p:nvSpPr>
-        <p:spPr/>
-        <p:txBody>
-          <a:bodyPr/>
-          <a:lstStyle/>
-          <a:p>
-            <a:r>
-              <a:t>Exercice 3</a:t>
-            </a:r>
-          </a:p>
-        </p:txBody>
-      </p:sp>
-      <p:sp>
-        <p:nvSpPr>
-          <p:cNvPr id="3" name="Content Placeholder 2"/>
-          <p:cNvSpPr>
-            <a:spLocks noGrp="1"/>
-          </p:cNvSpPr>
-          <p:nvPr>
-            <p:ph idx="1"/>
-          </p:nvPr>
-        </p:nvSpPr>
-        <p:spPr/>
-        <p:txBody>
-          <a:bodyPr/>
-          <a:lstStyle/>
-          <a:p>
-            <a:pPr>
-              <a:defRPr sz="2000"/>
-            </a:pPr>
-            <a:r>
-              <a:t>3️⃣ Quiz + forum + devoir + H5P</a:t>
-            </a:r>
-          </a:p>
-          <a:p>
-            <a:pPr>
-              <a:defRPr sz="2000"/>
-            </a:pPr>
-            <a:r>
-              <a:t>3️⃣ Paramètres feedback</a:t>
-            </a:r>
-          </a:p>
-        </p:txBody>
-      </p:sp>
-      <p:sp>
-        <p:nvSpPr>
-          <p:cNvPr id="4" name="TextBox 3"/>
+          <p:cNvPr id="2" name="TextBox 1"/>
           <p:cNvSpPr txBox="1"/>
           <p:nvPr/>
         </p:nvSpPr>
         <p:spPr>
           <a:xfrm>
-            <a:off x="365760" y="6446520"/>
-            <a:ext cx="8412480" cy="320040"/>
+            <a:off x="548640" y="365760"/>
+            <a:ext cx="7772400" cy="640080"/>
           </a:xfrm>
           <a:prstGeom prst="rect">
             <a:avLst/>
@@ -3733,20 +3892,118 @@
           <a:noFill/>
         </p:spPr>
         <p:txBody>
-          <a:bodyPr wrap="none">
+          <a:bodyPr wrap="square">
             <a:spAutoFit/>
           </a:bodyPr>
           <a:lstStyle/>
           <a:p>
             <a:pPr algn="ctr">
-              <a:defRPr sz="900">
-                <a:solidFill>
-                  <a:srgbClr val="404040"/>
-                </a:solidFill>
-              </a:defRPr>
-            </a:pPr>
-            <a:r>
-              <a:t>TD TIC — ENS 2ème année — Module Langues  •  Diapositive 5/10</a:t>
+              <a:defRPr sz="2600" b="1">
+                <a:solidFill>
+                  <a:srgbClr val="1A5C33"/>
+                </a:solidFill>
+              </a:defRPr>
+            </a:pPr>
+            <a:r>
+              <a:t>✏️ Exercices d'application</a:t>
+            </a:r>
+          </a:p>
+        </p:txBody>
+      </p:sp>
+      <p:sp>
+        <p:nvSpPr>
+          <p:cNvPr id="3" name="TextBox 2"/>
+          <p:cNvSpPr txBox="1"/>
+          <p:nvPr/>
+        </p:nvSpPr>
+        <p:spPr>
+          <a:xfrm>
+            <a:off x="548640" y="1828800"/>
+            <a:ext cx="7772400" cy="4572000"/>
+          </a:xfrm>
+          <a:prstGeom prst="rect">
+            <a:avLst/>
+          </a:prstGeom>
+          <a:noFill/>
+        </p:spPr>
+        <p:txBody>
+          <a:bodyPr wrap="square">
+            <a:spAutoFit/>
+          </a:bodyPr>
+          <a:lstStyle/>
+          <a:p>
+            <a:pPr>
+              <a:spcAft>
+                <a:spcPts val="600"/>
+              </a:spcAft>
+              <a:defRPr sz="1500">
+                <a:solidFill>
+                  <a:srgbClr val="222222"/>
+                </a:solidFill>
+              </a:defRPr>
+            </a:pPr>
+            <a:r>
+              <a:t>• Définir les concepts principaux du cours</a:t>
+            </a:r>
+          </a:p>
+          <a:p>
+            <a:pPr>
+              <a:spcAft>
+                <a:spcPts val="600"/>
+              </a:spcAft>
+              <a:defRPr sz="1500">
+                <a:solidFill>
+                  <a:srgbClr val="222222"/>
+                </a:solidFill>
+              </a:defRPr>
+            </a:pPr>
+            <a:r>
+              <a:t>• Identifier les applications pratiques</a:t>
+            </a:r>
+          </a:p>
+          <a:p>
+            <a:pPr>
+              <a:spcAft>
+                <a:spcPts val="600"/>
+              </a:spcAft>
+              <a:defRPr sz="1500">
+                <a:solidFill>
+                  <a:srgbClr val="222222"/>
+                </a:solidFill>
+              </a:defRPr>
+            </a:pPr>
+            <a:r>
+              <a:t>• Résoudre les exercices du TD</a:t>
+            </a:r>
+          </a:p>
+          <a:p>
+            <a:pPr>
+              <a:spcAft>
+                <a:spcPts val="600"/>
+              </a:spcAft>
+              <a:defRPr sz="1500">
+                <a:solidFill>
+                  <a:srgbClr val="222222"/>
+                </a:solidFill>
+              </a:defRPr>
+            </a:pPr>
+            <a:r>
+              <a:t>• Synthétiser les points clés en un paragraphe</a:t>
+            </a:r>
+          </a:p>
+          <a:p>
+            <a:pPr>
+              <a:spcAft>
+                <a:spcPts val="600"/>
+              </a:spcAft>
+              <a:defRPr sz="1500">
+                <a:solidFill>
+                  <a:srgbClr val="222222"/>
+                </a:solidFill>
+              </a:defRPr>
+            </a:pPr>
+            <a:r>
+              <a:t>• Préparer une courte présentation orale</a:t>
             </a:r>
           </a:p>
         </p:txBody>
@@ -3756,15 +4013,20 @@
   <p:clrMapOvr>
     <a:masterClrMapping/>
   </p:clrMapOvr>
-  <p:transition spd="med">
-    <p:fade/>
-  </p:transition>
 </p:sld>
 </file>
 
-<file path=ppt/slides/slide6.xml><?xml version="1.0" encoding="utf-8"?>
+<file path=ppt/slides/slide15.xml><?xml version="1.0" encoding="utf-8"?>
 <p:sld xmlns:a="http://schemas.openxmlformats.org/drawingml/2006/main" xmlns:p="http://schemas.openxmlformats.org/presentationml/2006/main" xmlns:r="http://schemas.openxmlformats.org/officeDocument/2006/relationships">
   <p:cSld>
+    <p:bg>
+      <p:bgPr>
+        <a:solidFill>
+          <a:srgbClr val="1A5C33"/>
+        </a:solidFill>
+        <a:effectLst/>
+      </p:bgPr>
+    </p:bg>
     <p:spTree>
       <p:nvGrpSpPr>
         <p:cNvPr id="1" name=""/>
@@ -3774,75 +4036,14 @@
       <p:grpSpPr/>
       <p:sp>
         <p:nvSpPr>
-          <p:cNvPr id="2" name="Title 1"/>
-          <p:cNvSpPr>
-            <a:spLocks noGrp="1"/>
-          </p:cNvSpPr>
-          <p:nvPr>
-            <p:ph type="title"/>
-          </p:nvPr>
-        </p:nvSpPr>
-        <p:spPr/>
-        <p:txBody>
-          <a:bodyPr/>
-          <a:lstStyle/>
-          <a:p>
-            <a:r>
-              <a:t>Exercice 4</a:t>
-            </a:r>
-          </a:p>
-        </p:txBody>
-      </p:sp>
-      <p:sp>
-        <p:nvSpPr>
-          <p:cNvPr id="3" name="Content Placeholder 2"/>
-          <p:cNvSpPr>
-            <a:spLocks noGrp="1"/>
-          </p:cNvSpPr>
-          <p:nvPr>
-            <p:ph idx="1"/>
-          </p:nvPr>
-        </p:nvSpPr>
-        <p:spPr/>
-        <p:txBody>
-          <a:bodyPr/>
-          <a:lstStyle/>
-          <a:p>
-            <a:pPr>
-              <a:defRPr sz="2000"/>
-            </a:pPr>
-            <a:r>
-              <a:t>4️⃣ Plan portfolio</a:t>
-            </a:r>
-          </a:p>
-          <a:p>
-            <a:pPr>
-              <a:defRPr sz="2000"/>
-            </a:pPr>
-            <a:r>
-              <a:t>4️⃣ Anonymisation</a:t>
-            </a:r>
-          </a:p>
-          <a:p>
-            <a:pPr>
-              <a:defRPr sz="2000"/>
-            </a:pPr>
-            <a:r>
-              <a:t>4️⃣ Retour d'expérience</a:t>
-            </a:r>
-          </a:p>
-        </p:txBody>
-      </p:sp>
-      <p:sp>
-        <p:nvSpPr>
-          <p:cNvPr id="4" name="TextBox 3"/>
+          <p:cNvPr id="2" name="TextBox 1"/>
           <p:cNvSpPr txBox="1"/>
           <p:nvPr/>
         </p:nvSpPr>
         <p:spPr>
           <a:xfrm>
-            <a:off x="365760" y="6446520"/>
-            <a:ext cx="8412480" cy="320040"/>
+            <a:off x="731520" y="1371600"/>
+            <a:ext cx="7680960" cy="914400"/>
           </a:xfrm>
           <a:prstGeom prst="rect">
             <a:avLst/>
@@ -3850,20 +4051,67 @@
           <a:noFill/>
         </p:spPr>
         <p:txBody>
-          <a:bodyPr wrap="none">
+          <a:bodyPr wrap="square">
             <a:spAutoFit/>
           </a:bodyPr>
           <a:lstStyle/>
           <a:p>
             <a:pPr algn="ctr">
-              <a:defRPr sz="900">
-                <a:solidFill>
-                  <a:srgbClr val="404040"/>
-                </a:solidFill>
-              </a:defRPr>
-            </a:pPr>
-            <a:r>
-              <a:t>TD TIC — ENS 2ème année — Module Langues  •  Diapositive 6/10</a:t>
+              <a:defRPr sz="2800" b="1">
+                <a:solidFill>
+                  <a:srgbClr val="FFFFFF"/>
+                </a:solidFill>
+              </a:defRPr>
+            </a:pPr>
+            <a:r>
+              <a:t>🎓 Conclusion</a:t>
+            </a:r>
+          </a:p>
+        </p:txBody>
+      </p:sp>
+      <p:sp>
+        <p:nvSpPr>
+          <p:cNvPr id="3" name="TextBox 2"/>
+          <p:cNvSpPr txBox="1"/>
+          <p:nvPr/>
+        </p:nvSpPr>
+        <p:spPr>
+          <a:xfrm>
+            <a:off x="731520" y="2743200"/>
+            <a:ext cx="7680960" cy="1828800"/>
+          </a:xfrm>
+          <a:prstGeom prst="rect">
+            <a:avLst/>
+          </a:prstGeom>
+          <a:noFill/>
+        </p:spPr>
+        <p:txBody>
+          <a:bodyPr wrap="square">
+            <a:spAutoFit/>
+          </a:bodyPr>
+          <a:lstStyle/>
+          <a:p>
+            <a:pPr algn="ctr">
+              <a:defRPr sz="1800" b="0">
+                <a:solidFill>
+                  <a:srgbClr val="C5D9C7"/>
+                </a:solidFill>
+              </a:defRPr>
+            </a:pPr>
+            <a:r>
+              <a:t>Dr. BELACEL Madani</a:t>
+            </a:r>
+            <a:br/>
+            <a:r>
+              <a:t>Maître de Conférences B</a:t>
+            </a:r>
+            <a:br/>
+            <a:r>
+              <a:t>Université de Mostaganem</a:t>
+            </a:r>
+            <a:br/>
+            <a:r>
+              <a:t>madani.belacel@univ-mosta.dz</a:t>
             </a:r>
           </a:p>
         </p:txBody>
@@ -3873,15 +4121,20 @@
   <p:clrMapOvr>
     <a:masterClrMapping/>
   </p:clrMapOvr>
-  <p:transition spd="med">
-    <p:fade/>
-  </p:transition>
 </p:sld>
 </file>
 
-<file path=ppt/slides/slide7.xml><?xml version="1.0" encoding="utf-8"?>
+<file path=ppt/slides/slide2.xml><?xml version="1.0" encoding="utf-8"?>
 <p:sld xmlns:a="http://schemas.openxmlformats.org/drawingml/2006/main" xmlns:p="http://schemas.openxmlformats.org/presentationml/2006/main" xmlns:r="http://schemas.openxmlformats.org/officeDocument/2006/relationships">
   <p:cSld>
+    <p:bg>
+      <p:bgPr>
+        <a:solidFill>
+          <a:srgbClr val="FFFFFF"/>
+        </a:solidFill>
+        <a:effectLst/>
+      </p:bgPr>
+    </p:bg>
     <p:spTree>
       <p:nvGrpSpPr>
         <p:cNvPr id="1" name=""/>
@@ -3891,75 +4144,14 @@
       <p:grpSpPr/>
       <p:sp>
         <p:nvSpPr>
-          <p:cNvPr id="2" name="Title 1"/>
-          <p:cNvSpPr>
-            <a:spLocks noGrp="1"/>
-          </p:cNvSpPr>
-          <p:nvPr>
-            <p:ph type="title"/>
-          </p:nvPr>
-        </p:nvSpPr>
-        <p:spPr/>
-        <p:txBody>
-          <a:bodyPr/>
-          <a:lstStyle/>
-          <a:p>
-            <a:r>
-              <a:t>Exercice 5</a:t>
-            </a:r>
-          </a:p>
-        </p:txBody>
-      </p:sp>
-      <p:sp>
-        <p:nvSpPr>
-          <p:cNvPr id="3" name="Content Placeholder 2"/>
-          <p:cNvSpPr>
-            <a:spLocks noGrp="1"/>
-          </p:cNvSpPr>
-          <p:nvPr>
-            <p:ph idx="1"/>
-          </p:nvPr>
-        </p:nvSpPr>
-        <p:spPr/>
-        <p:txBody>
-          <a:bodyPr/>
-          <a:lstStyle/>
-          <a:p>
-            <a:pPr>
-              <a:defRPr sz="2000"/>
-            </a:pPr>
-            <a:r>
-              <a:t>5️⃣ Charte lycée</a:t>
-            </a:r>
-          </a:p>
-          <a:p>
-            <a:pPr>
-              <a:defRPr sz="2000"/>
-            </a:pPr>
-            <a:r>
-              <a:t>5️⃣ Élèves + stagiaire</a:t>
-            </a:r>
-          </a:p>
-          <a:p>
-            <a:pPr>
-              <a:defRPr sz="2000"/>
-            </a:pPr>
-            <a:r>
-              <a:t>5️⃣ Procédure CVC</a:t>
-            </a:r>
-          </a:p>
-        </p:txBody>
-      </p:sp>
-      <p:sp>
-        <p:nvSpPr>
-          <p:cNvPr id="4" name="TextBox 3"/>
+          <p:cNvPr id="2" name="TextBox 1"/>
           <p:cNvSpPr txBox="1"/>
           <p:nvPr/>
         </p:nvSpPr>
         <p:spPr>
           <a:xfrm>
-            <a:off x="365760" y="6446520"/>
-            <a:ext cx="8412480" cy="320040"/>
+            <a:off x="548640" y="365760"/>
+            <a:ext cx="7772400" cy="640080"/>
           </a:xfrm>
           <a:prstGeom prst="rect">
             <a:avLst/>
@@ -3967,20 +4159,88 @@
           <a:noFill/>
         </p:spPr>
         <p:txBody>
-          <a:bodyPr wrap="none">
+          <a:bodyPr wrap="square">
             <a:spAutoFit/>
           </a:bodyPr>
           <a:lstStyle/>
           <a:p>
-            <a:pPr algn="ctr">
-              <a:defRPr sz="900">
-                <a:solidFill>
-                  <a:srgbClr val="404040"/>
-                </a:solidFill>
-              </a:defRPr>
-            </a:pPr>
-            <a:r>
-              <a:t>TD TIC — ENS 2ème année — Module Langues  •  Diapositive 7/10</a:t>
+            <a:pPr algn="l">
+              <a:defRPr sz="2600" b="1">
+                <a:solidFill>
+                  <a:srgbClr val="1A5C33"/>
+                </a:solidFill>
+              </a:defRPr>
+            </a:pPr>
+            <a:r>
+              <a:t>🎯 Objectifs pédagogiques</a:t>
+            </a:r>
+          </a:p>
+        </p:txBody>
+      </p:sp>
+      <p:sp>
+        <p:nvSpPr>
+          <p:cNvPr id="3" name="TextBox 2"/>
+          <p:cNvSpPr txBox="1"/>
+          <p:nvPr/>
+        </p:nvSpPr>
+        <p:spPr>
+          <a:xfrm>
+            <a:off x="548640" y="1828800"/>
+            <a:ext cx="7772400" cy="4572000"/>
+          </a:xfrm>
+          <a:prstGeom prst="rect">
+            <a:avLst/>
+          </a:prstGeom>
+          <a:noFill/>
+        </p:spPr>
+        <p:txBody>
+          <a:bodyPr wrap="square">
+            <a:spAutoFit/>
+          </a:bodyPr>
+          <a:lstStyle/>
+          <a:p>
+            <a:pPr>
+              <a:spcAft>
+                <a:spcPts val="600"/>
+              </a:spcAft>
+              <a:defRPr sz="1500">
+                <a:solidFill>
+                  <a:srgbClr val="222222"/>
+                </a:solidFill>
+              </a:defRPr>
+            </a:pPr>
+            <a:r>
+              <a:t>• Comprendre les concepts clés</a:t>
+            </a:r>
+          </a:p>
+          <a:p>
+            <a:pPr>
+              <a:spcAft>
+                <a:spcPts val="600"/>
+              </a:spcAft>
+              <a:defRPr sz="1500">
+                <a:solidFill>
+                  <a:srgbClr val="222222"/>
+                </a:solidFill>
+              </a:defRPr>
+            </a:pPr>
+            <a:r>
+              <a:t>• Appliquer les compétences</a:t>
+            </a:r>
+          </a:p>
+          <a:p>
+            <a:pPr>
+              <a:spcAft>
+                <a:spcPts val="600"/>
+              </a:spcAft>
+              <a:defRPr sz="1500">
+                <a:solidFill>
+                  <a:srgbClr val="222222"/>
+                </a:solidFill>
+              </a:defRPr>
+            </a:pPr>
+            <a:r>
+              <a:t>• Évaluer les technologies</a:t>
             </a:r>
           </a:p>
         </p:txBody>
@@ -3990,15 +4250,20 @@
   <p:clrMapOvr>
     <a:masterClrMapping/>
   </p:clrMapOvr>
-  <p:transition spd="med">
-    <p:fade/>
-  </p:transition>
 </p:sld>
 </file>
 
-<file path=ppt/slides/slide8.xml><?xml version="1.0" encoding="utf-8"?>
+<file path=ppt/slides/slide3.xml><?xml version="1.0" encoding="utf-8"?>
 <p:sld xmlns:a="http://schemas.openxmlformats.org/drawingml/2006/main" xmlns:p="http://schemas.openxmlformats.org/presentationml/2006/main" xmlns:r="http://schemas.openxmlformats.org/officeDocument/2006/relationships">
   <p:cSld>
+    <p:bg>
+      <p:bgPr>
+        <a:solidFill>
+          <a:srgbClr val="FFFFFF"/>
+        </a:solidFill>
+        <a:effectLst/>
+      </p:bgPr>
+    </p:bg>
     <p:spTree>
       <p:nvGrpSpPr>
         <p:cNvPr id="1" name=""/>
@@ -4008,75 +4273,14 @@
       <p:grpSpPr/>
       <p:sp>
         <p:nvSpPr>
-          <p:cNvPr id="2" name="Title 1"/>
-          <p:cNvSpPr>
-            <a:spLocks noGrp="1"/>
-          </p:cNvSpPr>
-          <p:nvPr>
-            <p:ph type="title"/>
-          </p:nvPr>
-        </p:nvSpPr>
-        <p:spPr/>
-        <p:txBody>
-          <a:bodyPr/>
-          <a:lstStyle/>
-          <a:p>
-            <a:r>
-              <a:t>Grille correction</a:t>
-            </a:r>
-          </a:p>
-        </p:txBody>
-      </p:sp>
-      <p:sp>
-        <p:nvSpPr>
-          <p:cNvPr id="3" name="Content Placeholder 2"/>
-          <p:cNvSpPr>
-            <a:spLocks noGrp="1"/>
-          </p:cNvSpPr>
-          <p:nvPr>
-            <p:ph idx="1"/>
-          </p:nvPr>
-        </p:nvSpPr>
-        <p:spPr/>
-        <p:txBody>
-          <a:bodyPr/>
-          <a:lstStyle/>
-          <a:p>
-            <a:pPr>
-              <a:defRPr sz="2000"/>
-            </a:pPr>
-            <a:r>
-              <a:t>✔️ Séquence 40 %</a:t>
-            </a:r>
-          </a:p>
-          <a:p>
-            <a:pPr>
-              <a:defRPr sz="2000"/>
-            </a:pPr>
-            <a:r>
-              <a:t>✔️ Portfolio 35 %</a:t>
-            </a:r>
-          </a:p>
-          <a:p>
-            <a:pPr>
-              <a:defRPr sz="2000"/>
-            </a:pPr>
-            <a:r>
-              <a:t>✔️ Réflexion 25 %</a:t>
-            </a:r>
-          </a:p>
-        </p:txBody>
-      </p:sp>
-      <p:sp>
-        <p:nvSpPr>
-          <p:cNvPr id="4" name="TextBox 3"/>
+          <p:cNvPr id="2" name="TextBox 1"/>
           <p:cNvSpPr txBox="1"/>
           <p:nvPr/>
         </p:nvSpPr>
         <p:spPr>
           <a:xfrm>
-            <a:off x="365760" y="6446520"/>
-            <a:ext cx="8412480" cy="320040"/>
+            <a:off x="548640" y="365760"/>
+            <a:ext cx="7772400" cy="640080"/>
           </a:xfrm>
           <a:prstGeom prst="rect">
             <a:avLst/>
@@ -4084,20 +4288,193 @@
           <a:noFill/>
         </p:spPr>
         <p:txBody>
-          <a:bodyPr wrap="none">
+          <a:bodyPr wrap="square">
             <a:spAutoFit/>
           </a:bodyPr>
           <a:lstStyle/>
           <a:p>
-            <a:pPr algn="ctr">
-              <a:defRPr sz="900">
-                <a:solidFill>
-                  <a:srgbClr val="404040"/>
-                </a:solidFill>
-              </a:defRPr>
-            </a:pPr>
-            <a:r>
-              <a:t>TD TIC — ENS 2ème année — Module Langues  •  Diapositive 8/10</a:t>
+            <a:pPr algn="l">
+              <a:defRPr sz="2600" b="1">
+                <a:solidFill>
+                  <a:srgbClr val="1A5C33"/>
+                </a:solidFill>
+              </a:defRPr>
+            </a:pPr>
+            <a:r>
+              <a:t>📋 Plan du cours</a:t>
+            </a:r>
+          </a:p>
+        </p:txBody>
+      </p:sp>
+      <p:sp>
+        <p:nvSpPr>
+          <p:cNvPr id="3" name="TextBox 2"/>
+          <p:cNvSpPr txBox="1"/>
+          <p:nvPr/>
+        </p:nvSpPr>
+        <p:spPr>
+          <a:xfrm>
+            <a:off x="548640" y="1828800"/>
+            <a:ext cx="7772400" cy="4572000"/>
+          </a:xfrm>
+          <a:prstGeom prst="rect">
+            <a:avLst/>
+          </a:prstGeom>
+          <a:noFill/>
+        </p:spPr>
+        <p:txBody>
+          <a:bodyPr wrap="square">
+            <a:spAutoFit/>
+          </a:bodyPr>
+          <a:lstStyle/>
+          <a:p>
+            <a:pPr>
+              <a:spcAft>
+                <a:spcPts val="600"/>
+              </a:spcAft>
+              <a:defRPr sz="1600">
+                <a:solidFill>
+                  <a:srgbClr val="222222"/>
+                </a:solidFill>
+              </a:defRPr>
+            </a:pPr>
+            <a:r>
+              <a:t>• Exercice 1 — Définition personnelle(15 min)</a:t>
+            </a:r>
+          </a:p>
+          <a:p>
+            <a:pPr>
+              <a:spcAft>
+                <a:spcPts val="600"/>
+              </a:spcAft>
+              <a:defRPr sz="1600">
+                <a:solidFill>
+                  <a:srgbClr val="222222"/>
+                </a:solidFill>
+              </a:defRPr>
+            </a:pPr>
+            <a:r>
+              <a:t>• Exercice 2 — Les trois dimensions(15 min)</a:t>
+            </a:r>
+          </a:p>
+          <a:p>
+            <a:pPr>
+              <a:spcAft>
+                <a:spcPts val="600"/>
+              </a:spcAft>
+              <a:defRPr sz="1600">
+                <a:solidFill>
+                  <a:srgbClr val="222222"/>
+                </a:solidFill>
+              </a:defRPr>
+            </a:pPr>
+            <a:r>
+              <a:t>• Exercice 3 — Fonctions des TIC(18 min)</a:t>
+            </a:r>
+          </a:p>
+          <a:p>
+            <a:pPr>
+              <a:spcAft>
+                <a:spcPts val="600"/>
+              </a:spcAft>
+              <a:defRPr sz="1600">
+                <a:solidFill>
+                  <a:srgbClr val="222222"/>
+                </a:solidFill>
+              </a:defRPr>
+            </a:pPr>
+            <a:r>
+              <a:t>• Exercice 4 — Applications en langues(18 min)</a:t>
+            </a:r>
+          </a:p>
+          <a:p>
+            <a:pPr>
+              <a:spcAft>
+                <a:spcPts val="600"/>
+              </a:spcAft>
+              <a:defRPr sz="1600">
+                <a:solidFill>
+                  <a:srgbClr val="222222"/>
+                </a:solidFill>
+              </a:defRPr>
+            </a:pPr>
+            <a:r>
+              <a:t>• Exercice 5 — Réflexion critique(14 min)</a:t>
+            </a:r>
+          </a:p>
+          <a:p>
+            <a:pPr>
+              <a:spcAft>
+                <a:spcPts val="600"/>
+              </a:spcAft>
+              <a:defRPr sz="1600">
+                <a:solidFill>
+                  <a:srgbClr val="222222"/>
+                </a:solidFill>
+              </a:defRPr>
+            </a:pPr>
+            <a:r>
+              <a:t>• Exercice 1 — Vocabulaire de base(15 min)</a:t>
+            </a:r>
+          </a:p>
+          <a:p>
+            <a:pPr>
+              <a:spcAft>
+                <a:spcPts val="600"/>
+              </a:spcAft>
+              <a:defRPr sz="1600">
+                <a:solidFill>
+                  <a:srgbClr val="222222"/>
+                </a:solidFill>
+              </a:defRPr>
+            </a:pPr>
+            <a:r>
+              <a:t>• Exercice 2 — Entrée / Traitement / Sortie(15 min)</a:t>
+            </a:r>
+          </a:p>
+          <a:p>
+            <a:pPr>
+              <a:spcAft>
+                <a:spcPts val="600"/>
+              </a:spcAft>
+              <a:defRPr sz="1600">
+                <a:solidFill>
+                  <a:srgbClr val="222222"/>
+                </a:solidFill>
+              </a:defRPr>
+            </a:pPr>
+            <a:r>
+              <a:t>• Exercice 3 — RAM vs stockage(18 min)</a:t>
+            </a:r>
+          </a:p>
+          <a:p>
+            <a:pPr>
+              <a:spcAft>
+                <a:spcPts val="600"/>
+              </a:spcAft>
+              <a:defRPr sz="1600">
+                <a:solidFill>
+                  <a:srgbClr val="222222"/>
+                </a:solidFill>
+              </a:defRPr>
+            </a:pPr>
+            <a:r>
+              <a:t>• Exercice 4 — Choix de support(18 min)</a:t>
+            </a:r>
+          </a:p>
+          <a:p>
+            <a:pPr>
+              <a:spcAft>
+                <a:spcPts val="600"/>
+              </a:spcAft>
+              <a:defRPr sz="1600">
+                <a:solidFill>
+                  <a:srgbClr val="222222"/>
+                </a:solidFill>
+              </a:defRPr>
+            </a:pPr>
+            <a:r>
+              <a:t>• Exercice 5 — Bonnes pratiques(14 min)</a:t>
             </a:r>
           </a:p>
         </p:txBody>
@@ -4107,15 +4484,20 @@
   <p:clrMapOvr>
     <a:masterClrMapping/>
   </p:clrMapOvr>
-  <p:transition spd="med">
-    <p:fade/>
-  </p:transition>
 </p:sld>
 </file>
 
-<file path=ppt/slides/slide9.xml><?xml version="1.0" encoding="utf-8"?>
+<file path=ppt/slides/slide4.xml><?xml version="1.0" encoding="utf-8"?>
 <p:sld xmlns:a="http://schemas.openxmlformats.org/drawingml/2006/main" xmlns:p="http://schemas.openxmlformats.org/presentationml/2006/main" xmlns:r="http://schemas.openxmlformats.org/officeDocument/2006/relationships">
   <p:cSld>
+    <p:bg>
+      <p:bgPr>
+        <a:solidFill>
+          <a:srgbClr val="FFFFFF"/>
+        </a:solidFill>
+        <a:effectLst/>
+      </p:bgPr>
+    </p:bg>
     <p:spTree>
       <p:nvGrpSpPr>
         <p:cNvPr id="1" name=""/>
@@ -4125,75 +4507,57 @@
       <p:grpSpPr/>
       <p:sp>
         <p:nvSpPr>
-          <p:cNvPr id="2" name="Title 1"/>
-          <p:cNvSpPr>
-            <a:spLocks noGrp="1"/>
-          </p:cNvSpPr>
-          <p:nvPr>
-            <p:ph type="title"/>
-          </p:nvPr>
-        </p:nvSpPr>
-        <p:spPr/>
-        <p:txBody>
-          <a:bodyPr/>
-          <a:lstStyle/>
-          <a:p>
-            <a:r>
-              <a:t>Livrable</a:t>
-            </a:r>
-          </a:p>
-        </p:txBody>
-      </p:sp>
-      <p:sp>
-        <p:nvSpPr>
-          <p:cNvPr id="3" name="Content Placeholder 2"/>
-          <p:cNvSpPr>
-            <a:spLocks noGrp="1"/>
-          </p:cNvSpPr>
-          <p:nvPr>
-            <p:ph idx="1"/>
-          </p:nvPr>
-        </p:nvSpPr>
-        <p:spPr/>
-        <p:txBody>
-          <a:bodyPr/>
-          <a:lstStyle/>
-          <a:p>
-            <a:pPr>
-              <a:defRPr sz="2000"/>
-            </a:pPr>
-            <a:r>
-              <a:t>📁 Séquence LMS</a:t>
-            </a:r>
-          </a:p>
-          <a:p>
-            <a:pPr>
-              <a:defRPr sz="2000"/>
-            </a:pPr>
-            <a:r>
-              <a:t>📁 Portfolio stage</a:t>
-            </a:r>
-          </a:p>
-          <a:p>
-            <a:pPr>
-              <a:defRPr sz="2000"/>
-            </a:pPr>
-            <a:r>
-              <a:t>📁 Note réflexive</a:t>
-            </a:r>
-          </a:p>
-        </p:txBody>
-      </p:sp>
-      <p:sp>
-        <p:nvSpPr>
-          <p:cNvPr id="4" name="TextBox 3"/>
+          <p:cNvPr id="2" name="Rectangle 1"/>
+          <p:cNvSpPr/>
+          <p:nvPr/>
+        </p:nvSpPr>
+        <p:spPr>
+          <a:xfrm>
+            <a:off x="0" y="0"/>
+            <a:ext cx="109728" cy="6858000"/>
+          </a:xfrm>
+          <a:prstGeom prst="rect">
+            <a:avLst/>
+          </a:prstGeom>
+          <a:solidFill>
+            <a:srgbClr val="2C6E49"/>
+          </a:solidFill>
+          <a:ln>
+            <a:noFill/>
+          </a:ln>
+        </p:spPr>
+        <p:style>
+          <a:lnRef idx="1">
+            <a:schemeClr val="accent1"/>
+          </a:lnRef>
+          <a:fillRef idx="3">
+            <a:schemeClr val="accent1"/>
+          </a:fillRef>
+          <a:effectRef idx="2">
+            <a:schemeClr val="accent1"/>
+          </a:effectRef>
+          <a:fontRef idx="minor">
+            <a:schemeClr val="lt1"/>
+          </a:fontRef>
+        </p:style>
+        <p:txBody>
+          <a:bodyPr rtlCol="0" anchor="ctr"/>
+          <a:lstStyle/>
+          <a:p>
+            <a:pPr algn="ctr"/>
+          </a:p>
+        </p:txBody>
+      </p:sp>
+      <p:sp>
+        <p:nvSpPr>
+          <p:cNvPr id="3" name="TextBox 2"/>
           <p:cNvSpPr txBox="1"/>
           <p:nvPr/>
         </p:nvSpPr>
         <p:spPr>
           <a:xfrm>
-            <a:off x="365760" y="6446520"/>
-            <a:ext cx="8412480" cy="320040"/>
+            <a:off x="457200" y="365760"/>
+            <a:ext cx="8229600" cy="640080"/>
           </a:xfrm>
           <a:prstGeom prst="rect">
             <a:avLst/>
@@ -4201,20 +4565,73 @@
           <a:noFill/>
         </p:spPr>
         <p:txBody>
-          <a:bodyPr wrap="none">
+          <a:bodyPr wrap="square">
             <a:spAutoFit/>
           </a:bodyPr>
           <a:lstStyle/>
           <a:p>
-            <a:pPr algn="ctr">
-              <a:defRPr sz="900">
-                <a:solidFill>
-                  <a:srgbClr val="404040"/>
-                </a:solidFill>
-              </a:defRPr>
-            </a:pPr>
-            <a:r>
-              <a:t>TD TIC — ENS 2ème année — Module Langues  •  Diapositive 9/10</a:t>
+            <a:pPr algn="l">
+              <a:defRPr sz="2200" b="1">
+                <a:solidFill>
+                  <a:srgbClr val="1A5C33"/>
+                </a:solidFill>
+              </a:defRPr>
+            </a:pPr>
+            <a:r>
+              <a:t>Exercice 1 — Définition personnelle(15 min)</a:t>
+            </a:r>
+          </a:p>
+        </p:txBody>
+      </p:sp>
+      <p:sp>
+        <p:nvSpPr>
+          <p:cNvPr id="4" name="TextBox 3"/>
+          <p:cNvSpPr txBox="1"/>
+          <p:nvPr/>
+        </p:nvSpPr>
+        <p:spPr>
+          <a:xfrm>
+            <a:off x="457200" y="1371600"/>
+            <a:ext cx="7772400" cy="4572000"/>
+          </a:xfrm>
+          <a:prstGeom prst="rect">
+            <a:avLst/>
+          </a:prstGeom>
+          <a:noFill/>
+        </p:spPr>
+        <p:txBody>
+          <a:bodyPr wrap="square">
+            <a:spAutoFit/>
+          </a:bodyPr>
+          <a:lstStyle/>
+          <a:p>
+            <a:pPr>
+              <a:spcAft>
+                <a:spcPts val="600"/>
+              </a:spcAft>
+              <a:defRPr sz="1400">
+                <a:solidFill>
+                  <a:srgbClr val="222222"/>
+                </a:solidFill>
+              </a:defRPr>
+            </a:pPr>
+            <a:r>
+              <a:t>• Énoncé :Donnez votre propre définition des TIC en 2-3 lignes, puis comparez-la à la définition UIT.</a:t>
+            </a:r>
+          </a:p>
+          <a:p>
+            <a:pPr>
+              <a:spcAft>
+                <a:spcPts val="600"/>
+              </a:spcAft>
+              <a:defRPr sz="1400">
+                <a:solidFill>
+                  <a:srgbClr val="222222"/>
+                </a:solidFill>
+              </a:defRPr>
+            </a:pPr>
+            <a:r>
+              <a:t>• Corrigé détaillé :Les TIC regroupent outils numériques de traitement, transmission et accès à l'information. L'UIT insiste sur la forme numérique et la convergence des technologies.</a:t>
             </a:r>
           </a:p>
         </p:txBody>
@@ -4224,9 +4641,795 @@
   <p:clrMapOvr>
     <a:masterClrMapping/>
   </p:clrMapOvr>
-  <p:transition spd="med">
-    <p:fade/>
-  </p:transition>
+</p:sld>
+</file>
+
+<file path=ppt/slides/slide5.xml><?xml version="1.0" encoding="utf-8"?>
+<p:sld xmlns:a="http://schemas.openxmlformats.org/drawingml/2006/main" xmlns:p="http://schemas.openxmlformats.org/presentationml/2006/main" xmlns:r="http://schemas.openxmlformats.org/officeDocument/2006/relationships">
+  <p:cSld>
+    <p:bg>
+      <p:bgPr>
+        <a:solidFill>
+          <a:srgbClr val="FFFFFF"/>
+        </a:solidFill>
+        <a:effectLst/>
+      </p:bgPr>
+    </p:bg>
+    <p:spTree>
+      <p:nvGrpSpPr>
+        <p:cNvPr id="1" name=""/>
+        <p:cNvGrpSpPr/>
+        <p:nvPr/>
+      </p:nvGrpSpPr>
+      <p:grpSpPr/>
+      <p:sp>
+        <p:nvSpPr>
+          <p:cNvPr id="2" name="Rectangle 1"/>
+          <p:cNvSpPr/>
+          <p:nvPr/>
+        </p:nvSpPr>
+        <p:spPr>
+          <a:xfrm>
+            <a:off x="0" y="0"/>
+            <a:ext cx="109728" cy="6858000"/>
+          </a:xfrm>
+          <a:prstGeom prst="rect">
+            <a:avLst/>
+          </a:prstGeom>
+          <a:solidFill>
+            <a:srgbClr val="2C6E49"/>
+          </a:solidFill>
+          <a:ln>
+            <a:noFill/>
+          </a:ln>
+        </p:spPr>
+        <p:style>
+          <a:lnRef idx="1">
+            <a:schemeClr val="accent1"/>
+          </a:lnRef>
+          <a:fillRef idx="3">
+            <a:schemeClr val="accent1"/>
+          </a:fillRef>
+          <a:effectRef idx="2">
+            <a:schemeClr val="accent1"/>
+          </a:effectRef>
+          <a:fontRef idx="minor">
+            <a:schemeClr val="lt1"/>
+          </a:fontRef>
+        </p:style>
+        <p:txBody>
+          <a:bodyPr rtlCol="0" anchor="ctr"/>
+          <a:lstStyle/>
+          <a:p>
+            <a:pPr algn="ctr"/>
+          </a:p>
+        </p:txBody>
+      </p:sp>
+      <p:sp>
+        <p:nvSpPr>
+          <p:cNvPr id="3" name="TextBox 2"/>
+          <p:cNvSpPr txBox="1"/>
+          <p:nvPr/>
+        </p:nvSpPr>
+        <p:spPr>
+          <a:xfrm>
+            <a:off x="457200" y="365760"/>
+            <a:ext cx="8229600" cy="640080"/>
+          </a:xfrm>
+          <a:prstGeom prst="rect">
+            <a:avLst/>
+          </a:prstGeom>
+          <a:noFill/>
+        </p:spPr>
+        <p:txBody>
+          <a:bodyPr wrap="square">
+            <a:spAutoFit/>
+          </a:bodyPr>
+          <a:lstStyle/>
+          <a:p>
+            <a:pPr algn="l">
+              <a:defRPr sz="2200" b="1">
+                <a:solidFill>
+                  <a:srgbClr val="1A5C33"/>
+                </a:solidFill>
+              </a:defRPr>
+            </a:pPr>
+            <a:r>
+              <a:t>Exercice 2 — Les trois dimensions(15 min)</a:t>
+            </a:r>
+          </a:p>
+        </p:txBody>
+      </p:sp>
+      <p:sp>
+        <p:nvSpPr>
+          <p:cNvPr id="4" name="TextBox 3"/>
+          <p:cNvSpPr txBox="1"/>
+          <p:nvPr/>
+        </p:nvSpPr>
+        <p:spPr>
+          <a:xfrm>
+            <a:off x="457200" y="1371600"/>
+            <a:ext cx="7772400" cy="4572000"/>
+          </a:xfrm>
+          <a:prstGeom prst="rect">
+            <a:avLst/>
+          </a:prstGeom>
+          <a:noFill/>
+        </p:spPr>
+        <p:txBody>
+          <a:bodyPr wrap="square">
+            <a:spAutoFit/>
+          </a:bodyPr>
+          <a:lstStyle/>
+          <a:p>
+            <a:pPr>
+              <a:spcAft>
+                <a:spcPts val="600"/>
+              </a:spcAft>
+              <a:defRPr sz="1400">
+                <a:solidFill>
+                  <a:srgbClr val="222222"/>
+                </a:solidFill>
+              </a:defRPr>
+            </a:pPr>
+            <a:r>
+              <a:t>• Énoncé :Expliquez avec des exemples personnels les trois dimensions : Techniques, Information, Communication.</a:t>
+            </a:r>
+          </a:p>
+          <a:p>
+            <a:pPr>
+              <a:spcAft>
+                <a:spcPts val="600"/>
+              </a:spcAft>
+              <a:defRPr sz="1400">
+                <a:solidFill>
+                  <a:srgbClr val="222222"/>
+                </a:solidFill>
+              </a:defRPr>
+            </a:pPr>
+            <a:r>
+              <a:t>• Corrigé détaillé :Technique = PC + Moodle ; Information = polycopié PDF ; Communication = email au professeur ou forum TD.</a:t>
+            </a:r>
+          </a:p>
+        </p:txBody>
+      </p:sp>
+    </p:spTree>
+  </p:cSld>
+  <p:clrMapOvr>
+    <a:masterClrMapping/>
+  </p:clrMapOvr>
+</p:sld>
+</file>
+
+<file path=ppt/slides/slide6.xml><?xml version="1.0" encoding="utf-8"?>
+<p:sld xmlns:a="http://schemas.openxmlformats.org/drawingml/2006/main" xmlns:p="http://schemas.openxmlformats.org/presentationml/2006/main" xmlns:r="http://schemas.openxmlformats.org/officeDocument/2006/relationships">
+  <p:cSld>
+    <p:bg>
+      <p:bgPr>
+        <a:solidFill>
+          <a:srgbClr val="FFFFFF"/>
+        </a:solidFill>
+        <a:effectLst/>
+      </p:bgPr>
+    </p:bg>
+    <p:spTree>
+      <p:nvGrpSpPr>
+        <p:cNvPr id="1" name=""/>
+        <p:cNvGrpSpPr/>
+        <p:nvPr/>
+      </p:nvGrpSpPr>
+      <p:grpSpPr/>
+      <p:sp>
+        <p:nvSpPr>
+          <p:cNvPr id="2" name="Rectangle 1"/>
+          <p:cNvSpPr/>
+          <p:nvPr/>
+        </p:nvSpPr>
+        <p:spPr>
+          <a:xfrm>
+            <a:off x="0" y="0"/>
+            <a:ext cx="109728" cy="6858000"/>
+          </a:xfrm>
+          <a:prstGeom prst="rect">
+            <a:avLst/>
+          </a:prstGeom>
+          <a:solidFill>
+            <a:srgbClr val="2C6E49"/>
+          </a:solidFill>
+          <a:ln>
+            <a:noFill/>
+          </a:ln>
+        </p:spPr>
+        <p:style>
+          <a:lnRef idx="1">
+            <a:schemeClr val="accent1"/>
+          </a:lnRef>
+          <a:fillRef idx="3">
+            <a:schemeClr val="accent1"/>
+          </a:fillRef>
+          <a:effectRef idx="2">
+            <a:schemeClr val="accent1"/>
+          </a:effectRef>
+          <a:fontRef idx="minor">
+            <a:schemeClr val="lt1"/>
+          </a:fontRef>
+        </p:style>
+        <p:txBody>
+          <a:bodyPr rtlCol="0" anchor="ctr"/>
+          <a:lstStyle/>
+          <a:p>
+            <a:pPr algn="ctr"/>
+          </a:p>
+        </p:txBody>
+      </p:sp>
+      <p:sp>
+        <p:nvSpPr>
+          <p:cNvPr id="3" name="TextBox 2"/>
+          <p:cNvSpPr txBox="1"/>
+          <p:nvPr/>
+        </p:nvSpPr>
+        <p:spPr>
+          <a:xfrm>
+            <a:off x="457200" y="365760"/>
+            <a:ext cx="8229600" cy="640080"/>
+          </a:xfrm>
+          <a:prstGeom prst="rect">
+            <a:avLst/>
+          </a:prstGeom>
+          <a:noFill/>
+        </p:spPr>
+        <p:txBody>
+          <a:bodyPr wrap="square">
+            <a:spAutoFit/>
+          </a:bodyPr>
+          <a:lstStyle/>
+          <a:p>
+            <a:pPr algn="l">
+              <a:defRPr sz="2200" b="1">
+                <a:solidFill>
+                  <a:srgbClr val="1A5C33"/>
+                </a:solidFill>
+              </a:defRPr>
+            </a:pPr>
+            <a:r>
+              <a:t>Exercice 3 — Fonctions des TIC(18 min)</a:t>
+            </a:r>
+          </a:p>
+        </p:txBody>
+      </p:sp>
+      <p:sp>
+        <p:nvSpPr>
+          <p:cNvPr id="4" name="TextBox 3"/>
+          <p:cNvSpPr txBox="1"/>
+          <p:nvPr/>
+        </p:nvSpPr>
+        <p:spPr>
+          <a:xfrm>
+            <a:off x="457200" y="1371600"/>
+            <a:ext cx="7772400" cy="4572000"/>
+          </a:xfrm>
+          <a:prstGeom prst="rect">
+            <a:avLst/>
+          </a:prstGeom>
+          <a:noFill/>
+        </p:spPr>
+        <p:txBody>
+          <a:bodyPr wrap="square">
+            <a:spAutoFit/>
+          </a:bodyPr>
+          <a:lstStyle/>
+          <a:p>
+            <a:pPr>
+              <a:spcAft>
+                <a:spcPts val="600"/>
+              </a:spcAft>
+              <a:defRPr sz="1400">
+                <a:solidFill>
+                  <a:srgbClr val="222222"/>
+                </a:solidFill>
+              </a:defRPr>
+            </a:pPr>
+            <a:r>
+              <a:t>• Énoncé :Pour chaque action, identifiez la fonction : traitement / transmission / sauvegarde.</a:t>
+            </a:r>
+            <a:br/>
+            <a:r>
+              <a:t>Rédaction Word, envoi email, copie USB, visioconférence Teams, impression PDF.</a:t>
+            </a:r>
+          </a:p>
+          <a:p>
+            <a:pPr>
+              <a:spcAft>
+                <a:spcPts val="600"/>
+              </a:spcAft>
+              <a:defRPr sz="1400">
+                <a:solidFill>
+                  <a:srgbClr val="222222"/>
+                </a:solidFill>
+              </a:defRPr>
+            </a:pPr>
+            <a:r>
+              <a:t>• Corrigé détaillé :Word → traitement ; email et Teams → transmission ; USB → sauvegarde ; impression → traitement/sortie.</a:t>
+            </a:r>
+          </a:p>
+        </p:txBody>
+      </p:sp>
+    </p:spTree>
+  </p:cSld>
+  <p:clrMapOvr>
+    <a:masterClrMapping/>
+  </p:clrMapOvr>
+</p:sld>
+</file>
+
+<file path=ppt/slides/slide7.xml><?xml version="1.0" encoding="utf-8"?>
+<p:sld xmlns:a="http://schemas.openxmlformats.org/drawingml/2006/main" xmlns:p="http://schemas.openxmlformats.org/presentationml/2006/main" xmlns:r="http://schemas.openxmlformats.org/officeDocument/2006/relationships">
+  <p:cSld>
+    <p:bg>
+      <p:bgPr>
+        <a:solidFill>
+          <a:srgbClr val="FFFFFF"/>
+        </a:solidFill>
+        <a:effectLst/>
+      </p:bgPr>
+    </p:bg>
+    <p:spTree>
+      <p:nvGrpSpPr>
+        <p:cNvPr id="1" name=""/>
+        <p:cNvGrpSpPr/>
+        <p:nvPr/>
+      </p:nvGrpSpPr>
+      <p:grpSpPr/>
+      <p:sp>
+        <p:nvSpPr>
+          <p:cNvPr id="2" name="Rectangle 1"/>
+          <p:cNvSpPr/>
+          <p:nvPr/>
+        </p:nvSpPr>
+        <p:spPr>
+          <a:xfrm>
+            <a:off x="0" y="0"/>
+            <a:ext cx="109728" cy="6858000"/>
+          </a:xfrm>
+          <a:prstGeom prst="rect">
+            <a:avLst/>
+          </a:prstGeom>
+          <a:solidFill>
+            <a:srgbClr val="2C6E49"/>
+          </a:solidFill>
+          <a:ln>
+            <a:noFill/>
+          </a:ln>
+        </p:spPr>
+        <p:style>
+          <a:lnRef idx="1">
+            <a:schemeClr val="accent1"/>
+          </a:lnRef>
+          <a:fillRef idx="3">
+            <a:schemeClr val="accent1"/>
+          </a:fillRef>
+          <a:effectRef idx="2">
+            <a:schemeClr val="accent1"/>
+          </a:effectRef>
+          <a:fontRef idx="minor">
+            <a:schemeClr val="lt1"/>
+          </a:fontRef>
+        </p:style>
+        <p:txBody>
+          <a:bodyPr rtlCol="0" anchor="ctr"/>
+          <a:lstStyle/>
+          <a:p>
+            <a:pPr algn="ctr"/>
+          </a:p>
+        </p:txBody>
+      </p:sp>
+      <p:sp>
+        <p:nvSpPr>
+          <p:cNvPr id="3" name="TextBox 2"/>
+          <p:cNvSpPr txBox="1"/>
+          <p:nvPr/>
+        </p:nvSpPr>
+        <p:spPr>
+          <a:xfrm>
+            <a:off x="457200" y="365760"/>
+            <a:ext cx="8229600" cy="640080"/>
+          </a:xfrm>
+          <a:prstGeom prst="rect">
+            <a:avLst/>
+          </a:prstGeom>
+          <a:noFill/>
+        </p:spPr>
+        <p:txBody>
+          <a:bodyPr wrap="square">
+            <a:spAutoFit/>
+          </a:bodyPr>
+          <a:lstStyle/>
+          <a:p>
+            <a:pPr algn="l">
+              <a:defRPr sz="2200" b="1">
+                <a:solidFill>
+                  <a:srgbClr val="1A5C33"/>
+                </a:solidFill>
+              </a:defRPr>
+            </a:pPr>
+            <a:r>
+              <a:t>Exercice 4 — Applications en langues(18 min)</a:t>
+            </a:r>
+          </a:p>
+        </p:txBody>
+      </p:sp>
+      <p:sp>
+        <p:nvSpPr>
+          <p:cNvPr id="4" name="TextBox 3"/>
+          <p:cNvSpPr txBox="1"/>
+          <p:nvPr/>
+        </p:nvSpPr>
+        <p:spPr>
+          <a:xfrm>
+            <a:off x="457200" y="1371600"/>
+            <a:ext cx="7772400" cy="4572000"/>
+          </a:xfrm>
+          <a:prstGeom prst="rect">
+            <a:avLst/>
+          </a:prstGeom>
+          <a:noFill/>
+        </p:spPr>
+        <p:txBody>
+          <a:bodyPr wrap="square">
+            <a:spAutoFit/>
+          </a:bodyPr>
+          <a:lstStyle/>
+          <a:p>
+            <a:pPr>
+              <a:spcAft>
+                <a:spcPts val="600"/>
+              </a:spcAft>
+              <a:defRPr sz="1400">
+                <a:solidFill>
+                  <a:srgbClr val="222222"/>
+                </a:solidFill>
+              </a:defRPr>
+            </a:pPr>
+            <a:r>
+              <a:t>• Énoncé :Citez 5 usages concrets des TIC pour un étudiant en langues étrangères.</a:t>
+            </a:r>
+          </a:p>
+          <a:p>
+            <a:pPr>
+              <a:spcAft>
+                <a:spcPts val="600"/>
+              </a:spcAft>
+              <a:defRPr sz="1400">
+                <a:solidFill>
+                  <a:srgbClr val="222222"/>
+                </a:solidFill>
+              </a:defRPr>
+            </a:pPr>
+            <a:r>
+              <a:t>• Corrigé détaillé :Corpus multilingues en ligne, visio avec locuteurs natifs, Moodle pour devoirs, bibliothèque numérique, PowerPoint pour exposés.</a:t>
+            </a:r>
+          </a:p>
+        </p:txBody>
+      </p:sp>
+    </p:spTree>
+  </p:cSld>
+  <p:clrMapOvr>
+    <a:masterClrMapping/>
+  </p:clrMapOvr>
+</p:sld>
+</file>
+
+<file path=ppt/slides/slide8.xml><?xml version="1.0" encoding="utf-8"?>
+<p:sld xmlns:a="http://schemas.openxmlformats.org/drawingml/2006/main" xmlns:p="http://schemas.openxmlformats.org/presentationml/2006/main" xmlns:r="http://schemas.openxmlformats.org/officeDocument/2006/relationships">
+  <p:cSld>
+    <p:bg>
+      <p:bgPr>
+        <a:solidFill>
+          <a:srgbClr val="FFFFFF"/>
+        </a:solidFill>
+        <a:effectLst/>
+      </p:bgPr>
+    </p:bg>
+    <p:spTree>
+      <p:nvGrpSpPr>
+        <p:cNvPr id="1" name=""/>
+        <p:cNvGrpSpPr/>
+        <p:nvPr/>
+      </p:nvGrpSpPr>
+      <p:grpSpPr/>
+      <p:sp>
+        <p:nvSpPr>
+          <p:cNvPr id="2" name="Rectangle 1"/>
+          <p:cNvSpPr/>
+          <p:nvPr/>
+        </p:nvSpPr>
+        <p:spPr>
+          <a:xfrm>
+            <a:off x="0" y="0"/>
+            <a:ext cx="109728" cy="6858000"/>
+          </a:xfrm>
+          <a:prstGeom prst="rect">
+            <a:avLst/>
+          </a:prstGeom>
+          <a:solidFill>
+            <a:srgbClr val="2C6E49"/>
+          </a:solidFill>
+          <a:ln>
+            <a:noFill/>
+          </a:ln>
+        </p:spPr>
+        <p:style>
+          <a:lnRef idx="1">
+            <a:schemeClr val="accent1"/>
+          </a:lnRef>
+          <a:fillRef idx="3">
+            <a:schemeClr val="accent1"/>
+          </a:fillRef>
+          <a:effectRef idx="2">
+            <a:schemeClr val="accent1"/>
+          </a:effectRef>
+          <a:fontRef idx="minor">
+            <a:schemeClr val="lt1"/>
+          </a:fontRef>
+        </p:style>
+        <p:txBody>
+          <a:bodyPr rtlCol="0" anchor="ctr"/>
+          <a:lstStyle/>
+          <a:p>
+            <a:pPr algn="ctr"/>
+          </a:p>
+        </p:txBody>
+      </p:sp>
+      <p:sp>
+        <p:nvSpPr>
+          <p:cNvPr id="3" name="TextBox 2"/>
+          <p:cNvSpPr txBox="1"/>
+          <p:nvPr/>
+        </p:nvSpPr>
+        <p:spPr>
+          <a:xfrm>
+            <a:off x="457200" y="365760"/>
+            <a:ext cx="8229600" cy="640080"/>
+          </a:xfrm>
+          <a:prstGeom prst="rect">
+            <a:avLst/>
+          </a:prstGeom>
+          <a:noFill/>
+        </p:spPr>
+        <p:txBody>
+          <a:bodyPr wrap="square">
+            <a:spAutoFit/>
+          </a:bodyPr>
+          <a:lstStyle/>
+          <a:p>
+            <a:pPr algn="l">
+              <a:defRPr sz="2200" b="1">
+                <a:solidFill>
+                  <a:srgbClr val="1A5C33"/>
+                </a:solidFill>
+              </a:defRPr>
+            </a:pPr>
+            <a:r>
+              <a:t>Exercice 5 — Réflexion critique(14 min)</a:t>
+            </a:r>
+          </a:p>
+        </p:txBody>
+      </p:sp>
+      <p:sp>
+        <p:nvSpPr>
+          <p:cNvPr id="4" name="TextBox 3"/>
+          <p:cNvSpPr txBox="1"/>
+          <p:nvPr/>
+        </p:nvSpPr>
+        <p:spPr>
+          <a:xfrm>
+            <a:off x="457200" y="1371600"/>
+            <a:ext cx="7772400" cy="4572000"/>
+          </a:xfrm>
+          <a:prstGeom prst="rect">
+            <a:avLst/>
+          </a:prstGeom>
+          <a:noFill/>
+        </p:spPr>
+        <p:txBody>
+          <a:bodyPr wrap="square">
+            <a:spAutoFit/>
+          </a:bodyPr>
+          <a:lstStyle/>
+          <a:p>
+            <a:pPr>
+              <a:spcAft>
+                <a:spcPts val="600"/>
+              </a:spcAft>
+              <a:defRPr sz="1400">
+                <a:solidFill>
+                  <a:srgbClr val="222222"/>
+                </a:solidFill>
+              </a:defRPr>
+            </a:pPr>
+            <a:r>
+              <a:t>• Énoncé :Rédigez un paragraphe (10-12 lignes) sur opportunités et risques des TIC pour les étudiants en langues.</a:t>
+            </a:r>
+          </a:p>
+          <a:p>
+            <a:pPr>
+              <a:spcAft>
+                <a:spcPts val="600"/>
+              </a:spcAft>
+              <a:defRPr sz="1400">
+                <a:solidFill>
+                  <a:srgbClr val="222222"/>
+                </a:solidFill>
+              </a:defRPr>
+            </a:pPr>
+            <a:r>
+              <a:t>• Corrigé détaillé :Opportunités : ressources mondiales, MOOC, collaboration. Risques : plagiat, désinformation, addiction, vie privée. Posture : esprit critique et éthique académique.</a:t>
+            </a:r>
+          </a:p>
+        </p:txBody>
+      </p:sp>
+    </p:spTree>
+  </p:cSld>
+  <p:clrMapOvr>
+    <a:masterClrMapping/>
+  </p:clrMapOvr>
+</p:sld>
+</file>
+
+<file path=ppt/slides/slide9.xml><?xml version="1.0" encoding="utf-8"?>
+<p:sld xmlns:a="http://schemas.openxmlformats.org/drawingml/2006/main" xmlns:p="http://schemas.openxmlformats.org/presentationml/2006/main" xmlns:r="http://schemas.openxmlformats.org/officeDocument/2006/relationships">
+  <p:cSld>
+    <p:bg>
+      <p:bgPr>
+        <a:solidFill>
+          <a:srgbClr val="FFFFFF"/>
+        </a:solidFill>
+        <a:effectLst/>
+      </p:bgPr>
+    </p:bg>
+    <p:spTree>
+      <p:nvGrpSpPr>
+        <p:cNvPr id="1" name=""/>
+        <p:cNvGrpSpPr/>
+        <p:nvPr/>
+      </p:nvGrpSpPr>
+      <p:grpSpPr/>
+      <p:sp>
+        <p:nvSpPr>
+          <p:cNvPr id="2" name="Rectangle 1"/>
+          <p:cNvSpPr/>
+          <p:nvPr/>
+        </p:nvSpPr>
+        <p:spPr>
+          <a:xfrm>
+            <a:off x="0" y="0"/>
+            <a:ext cx="109728" cy="6858000"/>
+          </a:xfrm>
+          <a:prstGeom prst="rect">
+            <a:avLst/>
+          </a:prstGeom>
+          <a:solidFill>
+            <a:srgbClr val="2C6E49"/>
+          </a:solidFill>
+          <a:ln>
+            <a:noFill/>
+          </a:ln>
+        </p:spPr>
+        <p:style>
+          <a:lnRef idx="1">
+            <a:schemeClr val="accent1"/>
+          </a:lnRef>
+          <a:fillRef idx="3">
+            <a:schemeClr val="accent1"/>
+          </a:fillRef>
+          <a:effectRef idx="2">
+            <a:schemeClr val="accent1"/>
+          </a:effectRef>
+          <a:fontRef idx="minor">
+            <a:schemeClr val="lt1"/>
+          </a:fontRef>
+        </p:style>
+        <p:txBody>
+          <a:bodyPr rtlCol="0" anchor="ctr"/>
+          <a:lstStyle/>
+          <a:p>
+            <a:pPr algn="ctr"/>
+          </a:p>
+        </p:txBody>
+      </p:sp>
+      <p:sp>
+        <p:nvSpPr>
+          <p:cNvPr id="3" name="TextBox 2"/>
+          <p:cNvSpPr txBox="1"/>
+          <p:nvPr/>
+        </p:nvSpPr>
+        <p:spPr>
+          <a:xfrm>
+            <a:off x="457200" y="365760"/>
+            <a:ext cx="8229600" cy="640080"/>
+          </a:xfrm>
+          <a:prstGeom prst="rect">
+            <a:avLst/>
+          </a:prstGeom>
+          <a:noFill/>
+        </p:spPr>
+        <p:txBody>
+          <a:bodyPr wrap="square">
+            <a:spAutoFit/>
+          </a:bodyPr>
+          <a:lstStyle/>
+          <a:p>
+            <a:pPr algn="l">
+              <a:defRPr sz="2200" b="1">
+                <a:solidFill>
+                  <a:srgbClr val="1A5C33"/>
+                </a:solidFill>
+              </a:defRPr>
+            </a:pPr>
+            <a:r>
+              <a:t>Exercice 1 — Vocabulaire de base(15 min)</a:t>
+            </a:r>
+          </a:p>
+        </p:txBody>
+      </p:sp>
+      <p:sp>
+        <p:nvSpPr>
+          <p:cNvPr id="4" name="TextBox 3"/>
+          <p:cNvSpPr txBox="1"/>
+          <p:nvPr/>
+        </p:nvSpPr>
+        <p:spPr>
+          <a:xfrm>
+            <a:off x="457200" y="1371600"/>
+            <a:ext cx="7772400" cy="4572000"/>
+          </a:xfrm>
+          <a:prstGeom prst="rect">
+            <a:avLst/>
+          </a:prstGeom>
+          <a:noFill/>
+        </p:spPr>
+        <p:txBody>
+          <a:bodyPr wrap="square">
+            <a:spAutoFit/>
+          </a:bodyPr>
+          <a:lstStyle/>
+          <a:p>
+            <a:pPr>
+              <a:spcAft>
+                <a:spcPts val="600"/>
+              </a:spcAft>
+              <a:defRPr sz="1400">
+                <a:solidFill>
+                  <a:srgbClr val="222222"/>
+                </a:solidFill>
+              </a:defRPr>
+            </a:pPr>
+            <a:r>
+              <a:t>• Énoncé :Définissez : informatique, hardware, software, CPU, RAM, SSD.</a:t>
+            </a:r>
+          </a:p>
+          <a:p>
+            <a:pPr>
+              <a:spcAft>
+                <a:spcPts val="600"/>
+              </a:spcAft>
+              <a:defRPr sz="1400">
+                <a:solidFill>
+                  <a:srgbClr val="222222"/>
+                </a:solidFill>
+              </a:defRPr>
+            </a:pPr>
+            <a:r>
+              <a:t>• Corrigé :Informatique = traitement automatique de l'information ; hardware = matériel ; software = logiciels ; CPU = processeur ; RAM = mémoire vive volatile ; SSD = stockage rapide non volatile.</a:t>
+            </a:r>
+          </a:p>
+        </p:txBody>
+      </p:sp>
+    </p:spTree>
+  </p:cSld>
+  <p:clrMapOvr>
+    <a:masterClrMapping/>
+  </p:clrMapOvr>
 </p:sld>
 </file>
 

--- a/cours/Module TIC/Département Français/ENS 2ème année/TD_TIC_ENS_2eme_annee_FR.pptx
+++ b/cours/Module TIC/Département Français/ENS 2ème année/TD_TIC_ENS_2eme_annee_FR.pptx
@@ -2850,7 +2850,7 @@
           <a:solidFill>
             <a:schemeClr val="tx1"/>
           </a:solidFill>
-          <a:latin typeface="+mj-lt"/>
+          <a:latin typeface="Poppins"/>
           <a:ea typeface="+mj-ea"/>
           <a:cs typeface="+mj-cs"/>
         </a:defRPr>
@@ -2867,7 +2867,7 @@
           <a:solidFill>
             <a:schemeClr val="tx1"/>
           </a:solidFill>
-          <a:latin typeface="+mn-lt"/>
+          <a:latin typeface="Poppins"/>
           <a:ea typeface="+mn-ea"/>
           <a:cs typeface="+mn-cs"/>
         </a:defRPr>
@@ -2882,7 +2882,7 @@
           <a:solidFill>
             <a:schemeClr val="tx1"/>
           </a:solidFill>
-          <a:latin typeface="+mn-lt"/>
+          <a:latin typeface="Poppins"/>
           <a:ea typeface="+mn-ea"/>
           <a:cs typeface="+mn-cs"/>
         </a:defRPr>
@@ -2897,7 +2897,7 @@
           <a:solidFill>
             <a:schemeClr val="tx1"/>
           </a:solidFill>
-          <a:latin typeface="+mn-lt"/>
+          <a:latin typeface="Poppins"/>
           <a:ea typeface="+mn-ea"/>
           <a:cs typeface="+mn-cs"/>
         </a:defRPr>
@@ -2912,7 +2912,7 @@
           <a:solidFill>
             <a:schemeClr val="tx1"/>
           </a:solidFill>
-          <a:latin typeface="+mn-lt"/>
+          <a:latin typeface="Poppins"/>
           <a:ea typeface="+mn-ea"/>
           <a:cs typeface="+mn-cs"/>
         </a:defRPr>
@@ -2927,7 +2927,7 @@
           <a:solidFill>
             <a:schemeClr val="tx1"/>
           </a:solidFill>
-          <a:latin typeface="+mn-lt"/>
+          <a:latin typeface="Poppins"/>
           <a:ea typeface="+mn-ea"/>
           <a:cs typeface="+mn-cs"/>
         </a:defRPr>
@@ -2942,7 +2942,7 @@
           <a:solidFill>
             <a:schemeClr val="tx1"/>
           </a:solidFill>
-          <a:latin typeface="+mn-lt"/>
+          <a:latin typeface="Poppins"/>
           <a:ea typeface="+mn-ea"/>
           <a:cs typeface="+mn-cs"/>
         </a:defRPr>
@@ -2957,7 +2957,7 @@
           <a:solidFill>
             <a:schemeClr val="tx1"/>
           </a:solidFill>
-          <a:latin typeface="+mn-lt"/>
+          <a:latin typeface="Poppins"/>
           <a:ea typeface="+mn-ea"/>
           <a:cs typeface="+mn-cs"/>
         </a:defRPr>
@@ -2972,7 +2972,7 @@
           <a:solidFill>
             <a:schemeClr val="tx1"/>
           </a:solidFill>
-          <a:latin typeface="+mn-lt"/>
+          <a:latin typeface="Poppins"/>
           <a:ea typeface="+mn-ea"/>
           <a:cs typeface="+mn-cs"/>
         </a:defRPr>
@@ -2987,7 +2987,7 @@
           <a:solidFill>
             <a:schemeClr val="tx1"/>
           </a:solidFill>
-          <a:latin typeface="+mn-lt"/>
+          <a:latin typeface="Poppins"/>
           <a:ea typeface="+mn-ea"/>
           <a:cs typeface="+mn-cs"/>
         </a:defRPr>
@@ -3002,7 +3002,7 @@
           <a:solidFill>
             <a:schemeClr val="tx1"/>
           </a:solidFill>
-          <a:latin typeface="+mn-lt"/>
+          <a:latin typeface="Poppins"/>
           <a:ea typeface="+mn-ea"/>
           <a:cs typeface="+mn-cs"/>
         </a:defRPr>
@@ -3012,7 +3012,7 @@
           <a:solidFill>
             <a:schemeClr val="tx1"/>
           </a:solidFill>
-          <a:latin typeface="+mn-lt"/>
+          <a:latin typeface="Poppins"/>
           <a:ea typeface="+mn-ea"/>
           <a:cs typeface="+mn-cs"/>
         </a:defRPr>
@@ -3022,7 +3022,7 @@
           <a:solidFill>
             <a:schemeClr val="tx1"/>
           </a:solidFill>
-          <a:latin typeface="+mn-lt"/>
+          <a:latin typeface="Poppins"/>
           <a:ea typeface="+mn-ea"/>
           <a:cs typeface="+mn-cs"/>
         </a:defRPr>
@@ -3032,7 +3032,7 @@
           <a:solidFill>
             <a:schemeClr val="tx1"/>
           </a:solidFill>
-          <a:latin typeface="+mn-lt"/>
+          <a:latin typeface="Poppins"/>
           <a:ea typeface="+mn-ea"/>
           <a:cs typeface="+mn-cs"/>
         </a:defRPr>
@@ -3042,7 +3042,7 @@
           <a:solidFill>
             <a:schemeClr val="tx1"/>
           </a:solidFill>
-          <a:latin typeface="+mn-lt"/>
+          <a:latin typeface="Poppins"/>
           <a:ea typeface="+mn-ea"/>
           <a:cs typeface="+mn-cs"/>
         </a:defRPr>
@@ -3052,7 +3052,7 @@
           <a:solidFill>
             <a:schemeClr val="tx1"/>
           </a:solidFill>
-          <a:latin typeface="+mn-lt"/>
+          <a:latin typeface="Poppins"/>
           <a:ea typeface="+mn-ea"/>
           <a:cs typeface="+mn-cs"/>
         </a:defRPr>
@@ -3062,7 +3062,7 @@
           <a:solidFill>
             <a:schemeClr val="tx1"/>
           </a:solidFill>
-          <a:latin typeface="+mn-lt"/>
+          <a:latin typeface="Poppins"/>
           <a:ea typeface="+mn-ea"/>
           <a:cs typeface="+mn-cs"/>
         </a:defRPr>
@@ -3072,7 +3072,7 @@
           <a:solidFill>
             <a:schemeClr val="tx1"/>
           </a:solidFill>
-          <a:latin typeface="+mn-lt"/>
+          <a:latin typeface="Poppins"/>
           <a:ea typeface="+mn-ea"/>
           <a:cs typeface="+mn-cs"/>
         </a:defRPr>
@@ -3082,7 +3082,7 @@
           <a:solidFill>
             <a:schemeClr val="tx1"/>
           </a:solidFill>
-          <a:latin typeface="+mn-lt"/>
+          <a:latin typeface="Poppins"/>
           <a:ea typeface="+mn-ea"/>
           <a:cs typeface="+mn-cs"/>
         </a:defRPr>
@@ -3097,9 +3097,7 @@
   <p:cSld>
     <p:bg>
       <p:bgPr>
-        <a:solidFill>
-          <a:srgbClr val="1A5C33"/>
-        </a:solidFill>
+        <a:solidFill>val="006847"/&gt;</a:solidFill>
         <a:effectLst/>
       </p:bgPr>
     </p:bg>
@@ -3134,9 +3132,7 @@
           <a:p>
             <a:pPr algn="ctr">
               <a:defRPr sz="3200" b="1">
-                <a:solidFill>
-                  <a:srgbClr val="FFFFFF"/>
-                </a:solidFill>
+                <a:solidFill>val="FFFFFF"/&gt;</a:solidFill>
               </a:defRPr>
             </a:pPr>
             <a:r>
@@ -3169,9 +3165,7 @@
           <a:p>
             <a:pPr algn="ctr">
               <a:defRPr sz="2000" b="0">
-                <a:solidFill>
-                  <a:srgbClr val="C5D9C7"/>
-                </a:solidFill>
+                <a:solidFill>val="DFE5EA"/&gt;</a:solidFill>
               </a:defRPr>
             </a:pPr>
             <a:r>
@@ -3204,13 +3198,52 @@
           <a:p>
             <a:pPr algn="ctr">
               <a:defRPr sz="1600" b="0">
+                <a:solidFill>val="B7C9BE"/&gt;</a:solidFill>
+              </a:defRPr>
+            </a:pPr>
+            <a:r>
+              <a:t>Université de Mostaganem — MCB</a:t>
+            </a:r>
+          </a:p>
+        </p:txBody>
+      </p:sp>
+      <p:sp>
+        <p:nvSpPr>
+          <p:cNvPr id="990001" name="Pied de page FLE"/>
+          <p:cNvSpPr>
+            <a:spLocks noGrp="1"/>
+          </p:cNvSpPr>
+          <p:nvPr/>
+        </p:nvSpPr>
+        <p:spPr>
+          <a:xfrm>
+            <a:off x="2880360" y="914400"/>
+            <a:ext cx="4572000" cy="274320"/>
+          </a:xfrm>
+          <a:prstGeom prst="rect">
+            <a:avLst/>
+          </a:prstGeom>
+        </p:spPr>
+        <p:txBody>
+          <a:bodyPr anchor="b"/>
+          <a:lstStyle/>
+          <a:p>
+            <a:pPr algn="r">
+              <a:defRPr sz="900">
                 <a:solidFill>
-                  <a:srgbClr val="A0CFA0"/>
+                  <a:srgbClr val="9AA7B6"/>
                 </a:solidFill>
-              </a:defRPr>
-            </a:pPr>
-            <a:r>
-              <a:t>Université de Mostaganem — MCB</a:t>
+                <a:latin typeface="Poppins"/>
+              </a:defRPr>
+            </a:pPr>
+            <a:r>
+              <a:rPr lang="fr-FR" sz="900">
+                <a:solidFill>
+                  <a:srgbClr val="9AA7B6"/>
+                </a:solidFill>
+                <a:latin typeface="Poppins"/>
+              </a:rPr>
+              <a:t>Université de Mostaganem — Dr. Madani BELACEL</a:t>
             </a:r>
           </a:p>
         </p:txBody>
@@ -3228,9 +3261,7 @@
   <p:cSld>
     <p:bg>
       <p:bgPr>
-        <a:solidFill>
-          <a:srgbClr val="FFFFFF"/>
-        </a:solidFill>
+        <a:solidFill>val="FFFFFF"/&gt;</a:solidFill>
         <a:effectLst/>
       </p:bgPr>
     </p:bg>
@@ -3255,9 +3286,7 @@
           <a:prstGeom prst="rect">
             <a:avLst/>
           </a:prstGeom>
-          <a:solidFill>
-            <a:srgbClr val="2C6E49"/>
-          </a:solidFill>
+          <a:solidFill>val="00875B"/&gt;</a:solidFill>
           <a:ln>
             <a:noFill/>
           </a:ln>
@@ -3308,9 +3337,7 @@
           <a:p>
             <a:pPr algn="l">
               <a:defRPr sz="2200" b="1">
-                <a:solidFill>
-                  <a:srgbClr val="1A5C33"/>
-                </a:solidFill>
+                <a:solidFill>val="006847"/&gt;</a:solidFill>
               </a:defRPr>
             </a:pPr>
             <a:r>
@@ -3346,9 +3373,7 @@
                 <a:spcPts val="600"/>
               </a:spcAft>
               <a:defRPr sz="1400">
-                <a:solidFill>
-                  <a:srgbClr val="222222"/>
-                </a:solidFill>
+                <a:solidFill>val="22344A"/&gt;</a:solidFill>
               </a:defRPr>
             </a:pPr>
             <a:r>
@@ -3361,13 +3386,52 @@
                 <a:spcPts val="600"/>
               </a:spcAft>
               <a:defRPr sz="1400">
+                <a:solidFill>val="22344A"/&gt;</a:solidFill>
+              </a:defRPr>
+            </a:pPr>
+            <a:r>
+              <a:t>• Corrigé :Entrée : clavier, micro ; Traitement : processeur ; Sortie : écran, imprimante ; Stockage : disque dur.</a:t>
+            </a:r>
+          </a:p>
+        </p:txBody>
+      </p:sp>
+      <p:sp>
+        <p:nvSpPr>
+          <p:cNvPr id="990001" name="Pied de page FLE"/>
+          <p:cNvSpPr>
+            <a:spLocks noGrp="1"/>
+          </p:cNvSpPr>
+          <p:nvPr/>
+        </p:nvSpPr>
+        <p:spPr>
+          <a:xfrm>
+            <a:off x="-228600" y="6400800"/>
+            <a:ext cx="109728" cy="274320"/>
+          </a:xfrm>
+          <a:prstGeom prst="rect">
+            <a:avLst/>
+          </a:prstGeom>
+        </p:spPr>
+        <p:txBody>
+          <a:bodyPr anchor="b"/>
+          <a:lstStyle/>
+          <a:p>
+            <a:pPr algn="r">
+              <a:defRPr sz="900">
                 <a:solidFill>
-                  <a:srgbClr val="222222"/>
+                  <a:srgbClr val="9AA7B6"/>
                 </a:solidFill>
-              </a:defRPr>
-            </a:pPr>
-            <a:r>
-              <a:t>• Corrigé :Entrée : clavier, micro ; Traitement : processeur ; Sortie : écran, imprimante ; Stockage : disque dur.</a:t>
+                <a:latin typeface="Poppins"/>
+              </a:defRPr>
+            </a:pPr>
+            <a:r>
+              <a:rPr lang="fr-FR" sz="900">
+                <a:solidFill>
+                  <a:srgbClr val="9AA7B6"/>
+                </a:solidFill>
+                <a:latin typeface="Poppins"/>
+              </a:rPr>
+              <a:t>Université de Mostaganem — Dr. Madani BELACEL</a:t>
             </a:r>
           </a:p>
         </p:txBody>
@@ -3385,9 +3449,7 @@
   <p:cSld>
     <p:bg>
       <p:bgPr>
-        <a:solidFill>
-          <a:srgbClr val="FFFFFF"/>
-        </a:solidFill>
+        <a:solidFill>val="FFFFFF"/&gt;</a:solidFill>
         <a:effectLst/>
       </p:bgPr>
     </p:bg>
@@ -3412,9 +3474,7 @@
           <a:prstGeom prst="rect">
             <a:avLst/>
           </a:prstGeom>
-          <a:solidFill>
-            <a:srgbClr val="2C6E49"/>
-          </a:solidFill>
+          <a:solidFill>val="00875B"/&gt;</a:solidFill>
           <a:ln>
             <a:noFill/>
           </a:ln>
@@ -3465,9 +3525,7 @@
           <a:p>
             <a:pPr algn="l">
               <a:defRPr sz="2200" b="1">
-                <a:solidFill>
-                  <a:srgbClr val="1A5C33"/>
-                </a:solidFill>
+                <a:solidFill>val="006847"/&gt;</a:solidFill>
               </a:defRPr>
             </a:pPr>
             <a:r>
@@ -3503,9 +3561,7 @@
                 <a:spcPts val="600"/>
               </a:spcAft>
               <a:defRPr sz="1400">
-                <a:solidFill>
-                  <a:srgbClr val="222222"/>
-                </a:solidFill>
+                <a:solidFill>val="22344A"/&gt;</a:solidFill>
               </a:defRPr>
             </a:pPr>
             <a:r>
@@ -3518,13 +3574,52 @@
                 <a:spcPts val="600"/>
               </a:spcAft>
               <a:defRPr sz="1400">
+                <a:solidFill>val="22344A"/&gt;</a:solidFill>
+              </a:defRPr>
+            </a:pPr>
+            <a:r>
+              <a:t>• Corrigé :Les données en cours d'édition sont en RAM (volatile). Sans enregistrement sur disque/SSD/cloud, elles sont perdues à l'arrêt.</a:t>
+            </a:r>
+          </a:p>
+        </p:txBody>
+      </p:sp>
+      <p:sp>
+        <p:nvSpPr>
+          <p:cNvPr id="990001" name="Pied de page FLE"/>
+          <p:cNvSpPr>
+            <a:spLocks noGrp="1"/>
+          </p:cNvSpPr>
+          <p:nvPr/>
+        </p:nvSpPr>
+        <p:spPr>
+          <a:xfrm>
+            <a:off x="-228600" y="6400800"/>
+            <a:ext cx="109728" cy="274320"/>
+          </a:xfrm>
+          <a:prstGeom prst="rect">
+            <a:avLst/>
+          </a:prstGeom>
+        </p:spPr>
+        <p:txBody>
+          <a:bodyPr anchor="b"/>
+          <a:lstStyle/>
+          <a:p>
+            <a:pPr algn="r">
+              <a:defRPr sz="900">
                 <a:solidFill>
-                  <a:srgbClr val="222222"/>
+                  <a:srgbClr val="9AA7B6"/>
                 </a:solidFill>
-              </a:defRPr>
-            </a:pPr>
-            <a:r>
-              <a:t>• Corrigé :Les données en cours d'édition sont en RAM (volatile). Sans enregistrement sur disque/SSD/cloud, elles sont perdues à l'arrêt.</a:t>
+                <a:latin typeface="Poppins"/>
+              </a:defRPr>
+            </a:pPr>
+            <a:r>
+              <a:rPr lang="fr-FR" sz="900">
+                <a:solidFill>
+                  <a:srgbClr val="9AA7B6"/>
+                </a:solidFill>
+                <a:latin typeface="Poppins"/>
+              </a:rPr>
+              <a:t>Université de Mostaganem — Dr. Madani BELACEL</a:t>
             </a:r>
           </a:p>
         </p:txBody>
@@ -3542,9 +3637,7 @@
   <p:cSld>
     <p:bg>
       <p:bgPr>
-        <a:solidFill>
-          <a:srgbClr val="FFFFFF"/>
-        </a:solidFill>
+        <a:solidFill>val="FFFFFF"/&gt;</a:solidFill>
         <a:effectLst/>
       </p:bgPr>
     </p:bg>
@@ -3569,9 +3662,7 @@
           <a:prstGeom prst="rect">
             <a:avLst/>
           </a:prstGeom>
-          <a:solidFill>
-            <a:srgbClr val="2C6E49"/>
-          </a:solidFill>
+          <a:solidFill>val="00875B"/&gt;</a:solidFill>
           <a:ln>
             <a:noFill/>
           </a:ln>
@@ -3622,9 +3713,7 @@
           <a:p>
             <a:pPr algn="l">
               <a:defRPr sz="2200" b="1">
-                <a:solidFill>
-                  <a:srgbClr val="1A5C33"/>
-                </a:solidFill>
+                <a:solidFill>val="006847"/&gt;</a:solidFill>
               </a:defRPr>
             </a:pPr>
             <a:r>
@@ -3660,9 +3749,7 @@
                 <a:spcPts val="600"/>
               </a:spcAft>
               <a:defRPr sz="1400">
-                <a:solidFill>
-                  <a:srgbClr val="222222"/>
-                </a:solidFill>
+                <a:solidFill>val="22344A"/&gt;</a:solidFill>
               </a:defRPr>
             </a:pPr>
             <a:r>
@@ -3675,13 +3762,52 @@
                 <a:spcPts val="600"/>
               </a:spcAft>
               <a:defRPr sz="1400">
+                <a:solidFill>val="22344A"/&gt;</a:solidFill>
+              </a:defRPr>
+            </a:pPr>
+            <a:r>
+              <a:t>• Corrigé :SSD pour usage quotidien ; HDD ou cloud pour archives ; clé USB pour transport ponctuel.</a:t>
+            </a:r>
+          </a:p>
+        </p:txBody>
+      </p:sp>
+      <p:sp>
+        <p:nvSpPr>
+          <p:cNvPr id="990001" name="Pied de page FLE"/>
+          <p:cNvSpPr>
+            <a:spLocks noGrp="1"/>
+          </p:cNvSpPr>
+          <p:nvPr/>
+        </p:nvSpPr>
+        <p:spPr>
+          <a:xfrm>
+            <a:off x="-228600" y="6400800"/>
+            <a:ext cx="109728" cy="274320"/>
+          </a:xfrm>
+          <a:prstGeom prst="rect">
+            <a:avLst/>
+          </a:prstGeom>
+        </p:spPr>
+        <p:txBody>
+          <a:bodyPr anchor="b"/>
+          <a:lstStyle/>
+          <a:p>
+            <a:pPr algn="r">
+              <a:defRPr sz="900">
                 <a:solidFill>
-                  <a:srgbClr val="222222"/>
+                  <a:srgbClr val="9AA7B6"/>
                 </a:solidFill>
-              </a:defRPr>
-            </a:pPr>
-            <a:r>
-              <a:t>• Corrigé :SSD pour usage quotidien ; HDD ou cloud pour archives ; clé USB pour transport ponctuel.</a:t>
+                <a:latin typeface="Poppins"/>
+              </a:defRPr>
+            </a:pPr>
+            <a:r>
+              <a:rPr lang="fr-FR" sz="900">
+                <a:solidFill>
+                  <a:srgbClr val="9AA7B6"/>
+                </a:solidFill>
+                <a:latin typeface="Poppins"/>
+              </a:rPr>
+              <a:t>Université de Mostaganem — Dr. Madani BELACEL</a:t>
             </a:r>
           </a:p>
         </p:txBody>
@@ -3699,9 +3825,7 @@
   <p:cSld>
     <p:bg>
       <p:bgPr>
-        <a:solidFill>
-          <a:srgbClr val="E8F0E9"/>
-        </a:solidFill>
+        <a:solidFill>val="F4F6F8"/&gt;</a:solidFill>
         <a:effectLst/>
       </p:bgPr>
     </p:bg>
@@ -3736,9 +3860,7 @@
           <a:p>
             <a:pPr algn="ctr">
               <a:defRPr sz="2600" b="1">
-                <a:solidFill>
-                  <a:srgbClr val="1A5C33"/>
-                </a:solidFill>
+                <a:solidFill>val="006847"/&gt;</a:solidFill>
               </a:defRPr>
             </a:pPr>
             <a:r>
@@ -3774,9 +3896,7 @@
                 <a:spcPts val="600"/>
               </a:spcAft>
               <a:defRPr sz="1600">
-                <a:solidFill>
-                  <a:srgbClr val="222222"/>
-                </a:solidFill>
+                <a:solidFill>val="22344A"/&gt;</a:solidFill>
               </a:defRPr>
             </a:pPr>
             <a:r>
@@ -3789,9 +3909,7 @@
                 <a:spcPts val="600"/>
               </a:spcAft>
               <a:defRPr sz="1600">
-                <a:solidFill>
-                  <a:srgbClr val="222222"/>
-                </a:solidFill>
+                <a:solidFill>val="22344A"/&gt;</a:solidFill>
               </a:defRPr>
             </a:pPr>
             <a:r>
@@ -3804,9 +3922,7 @@
                 <a:spcPts val="600"/>
               </a:spcAft>
               <a:defRPr sz="1600">
-                <a:solidFill>
-                  <a:srgbClr val="222222"/>
-                </a:solidFill>
+                <a:solidFill>val="22344A"/&gt;</a:solidFill>
               </a:defRPr>
             </a:pPr>
             <a:r>
@@ -3823,9 +3939,7 @@
                 <a:spcPts val="600"/>
               </a:spcAft>
               <a:defRPr sz="1600">
-                <a:solidFill>
-                  <a:srgbClr val="222222"/>
-                </a:solidFill>
+                <a:solidFill>val="22344A"/&gt;</a:solidFill>
               </a:defRPr>
             </a:pPr>
             <a:r>
@@ -3838,13 +3952,52 @@
                 <a:spcPts val="600"/>
               </a:spcAft>
               <a:defRPr sz="1600">
+                <a:solidFill>val="22344A"/&gt;</a:solidFill>
+              </a:defRPr>
+            </a:pPr>
+            <a:r>
+              <a:t>• Énoncé :Rédigez un paragraphe (10-12 lignes) sur opportunités et risques des TIC pour les étudiants en langues.</a:t>
+            </a:r>
+          </a:p>
+        </p:txBody>
+      </p:sp>
+      <p:sp>
+        <p:nvSpPr>
+          <p:cNvPr id="990001" name="Pied de page FLE"/>
+          <p:cNvSpPr>
+            <a:spLocks noGrp="1"/>
+          </p:cNvSpPr>
+          <p:nvPr/>
+        </p:nvSpPr>
+        <p:spPr>
+          <a:xfrm>
+            <a:off x="2971800" y="182880"/>
+            <a:ext cx="4572000" cy="274320"/>
+          </a:xfrm>
+          <a:prstGeom prst="rect">
+            <a:avLst/>
+          </a:prstGeom>
+        </p:spPr>
+        <p:txBody>
+          <a:bodyPr anchor="b"/>
+          <a:lstStyle/>
+          <a:p>
+            <a:pPr algn="r">
+              <a:defRPr sz="900">
                 <a:solidFill>
-                  <a:srgbClr val="222222"/>
+                  <a:srgbClr val="9AA7B6"/>
                 </a:solidFill>
-              </a:defRPr>
-            </a:pPr>
-            <a:r>
-              <a:t>• Énoncé :Rédigez un paragraphe (10-12 lignes) sur opportunités et risques des TIC pour les étudiants en langues.</a:t>
+                <a:latin typeface="Poppins"/>
+              </a:defRPr>
+            </a:pPr>
+            <a:r>
+              <a:rPr lang="fr-FR" sz="900">
+                <a:solidFill>
+                  <a:srgbClr val="9AA7B6"/>
+                </a:solidFill>
+                <a:latin typeface="Poppins"/>
+              </a:rPr>
+              <a:t>Université de Mostaganem — Dr. Madani BELACEL</a:t>
             </a:r>
           </a:p>
         </p:txBody>
@@ -3862,9 +4015,7 @@
   <p:cSld>
     <p:bg>
       <p:bgPr>
-        <a:solidFill>
-          <a:srgbClr val="FFFFFF"/>
-        </a:solidFill>
+        <a:solidFill>val="FFFFFF"/&gt;</a:solidFill>
         <a:effectLst/>
       </p:bgPr>
     </p:bg>
@@ -3899,9 +4050,7 @@
           <a:p>
             <a:pPr algn="ctr">
               <a:defRPr sz="2600" b="1">
-                <a:solidFill>
-                  <a:srgbClr val="1A5C33"/>
-                </a:solidFill>
+                <a:solidFill>val="006847"/&gt;</a:solidFill>
               </a:defRPr>
             </a:pPr>
             <a:r>
@@ -3937,9 +4086,7 @@
                 <a:spcPts val="600"/>
               </a:spcAft>
               <a:defRPr sz="1500">
-                <a:solidFill>
-                  <a:srgbClr val="222222"/>
-                </a:solidFill>
+                <a:solidFill>val="22344A"/&gt;</a:solidFill>
               </a:defRPr>
             </a:pPr>
             <a:r>
@@ -3952,9 +4099,7 @@
                 <a:spcPts val="600"/>
               </a:spcAft>
               <a:defRPr sz="1500">
-                <a:solidFill>
-                  <a:srgbClr val="222222"/>
-                </a:solidFill>
+                <a:solidFill>val="22344A"/&gt;</a:solidFill>
               </a:defRPr>
             </a:pPr>
             <a:r>
@@ -3967,9 +4112,7 @@
                 <a:spcPts val="600"/>
               </a:spcAft>
               <a:defRPr sz="1500">
-                <a:solidFill>
-                  <a:srgbClr val="222222"/>
-                </a:solidFill>
+                <a:solidFill>val="22344A"/&gt;</a:solidFill>
               </a:defRPr>
             </a:pPr>
             <a:r>
@@ -3982,9 +4125,7 @@
                 <a:spcPts val="600"/>
               </a:spcAft>
               <a:defRPr sz="1500">
-                <a:solidFill>
-                  <a:srgbClr val="222222"/>
-                </a:solidFill>
+                <a:solidFill>val="22344A"/&gt;</a:solidFill>
               </a:defRPr>
             </a:pPr>
             <a:r>
@@ -3997,13 +4138,52 @@
                 <a:spcPts val="600"/>
               </a:spcAft>
               <a:defRPr sz="1500">
+                <a:solidFill>val="22344A"/&gt;</a:solidFill>
+              </a:defRPr>
+            </a:pPr>
+            <a:r>
+              <a:t>• Préparer une courte présentation orale</a:t>
+            </a:r>
+          </a:p>
+        </p:txBody>
+      </p:sp>
+      <p:sp>
+        <p:nvSpPr>
+          <p:cNvPr id="990001" name="Pied de page FLE"/>
+          <p:cNvSpPr>
+            <a:spLocks noGrp="1"/>
+          </p:cNvSpPr>
+          <p:nvPr/>
+        </p:nvSpPr>
+        <p:spPr>
+          <a:xfrm>
+            <a:off x="2971800" y="182880"/>
+            <a:ext cx="4572000" cy="274320"/>
+          </a:xfrm>
+          <a:prstGeom prst="rect">
+            <a:avLst/>
+          </a:prstGeom>
+        </p:spPr>
+        <p:txBody>
+          <a:bodyPr anchor="b"/>
+          <a:lstStyle/>
+          <a:p>
+            <a:pPr algn="r">
+              <a:defRPr sz="900">
                 <a:solidFill>
-                  <a:srgbClr val="222222"/>
+                  <a:srgbClr val="9AA7B6"/>
                 </a:solidFill>
-              </a:defRPr>
-            </a:pPr>
-            <a:r>
-              <a:t>• Préparer une courte présentation orale</a:t>
+                <a:latin typeface="Poppins"/>
+              </a:defRPr>
+            </a:pPr>
+            <a:r>
+              <a:rPr lang="fr-FR" sz="900">
+                <a:solidFill>
+                  <a:srgbClr val="9AA7B6"/>
+                </a:solidFill>
+                <a:latin typeface="Poppins"/>
+              </a:rPr>
+              <a:t>Université de Mostaganem — Dr. Madani BELACEL</a:t>
             </a:r>
           </a:p>
         </p:txBody>
@@ -4021,9 +4201,7 @@
   <p:cSld>
     <p:bg>
       <p:bgPr>
-        <a:solidFill>
-          <a:srgbClr val="1A5C33"/>
-        </a:solidFill>
+        <a:solidFill>val="006847"/&gt;</a:solidFill>
         <a:effectLst/>
       </p:bgPr>
     </p:bg>
@@ -4058,9 +4236,7 @@
           <a:p>
             <a:pPr algn="ctr">
               <a:defRPr sz="2800" b="1">
-                <a:solidFill>
-                  <a:srgbClr val="FFFFFF"/>
-                </a:solidFill>
+                <a:solidFill>val="FFFFFF"/&gt;</a:solidFill>
               </a:defRPr>
             </a:pPr>
             <a:r>
@@ -4093,25 +4269,64 @@
           <a:p>
             <a:pPr algn="ctr">
               <a:defRPr sz="1800" b="0">
+                <a:solidFill>val="DFE5EA"/&gt;</a:solidFill>
+              </a:defRPr>
+            </a:pPr>
+            <a:r>
+              <a:t>Dr. BELACEL Madani</a:t>
+            </a:r>
+            <a:br/>
+            <a:r>
+              <a:t>Maître de Conférences B</a:t>
+            </a:r>
+            <a:br/>
+            <a:r>
+              <a:t>Université de Mostaganem</a:t>
+            </a:r>
+            <a:br/>
+            <a:r>
+              <a:t>madani.belacel@univ-mosta.dz</a:t>
+            </a:r>
+          </a:p>
+        </p:txBody>
+      </p:sp>
+      <p:sp>
+        <p:nvSpPr>
+          <p:cNvPr id="990001" name="Pied de page FLE"/>
+          <p:cNvSpPr>
+            <a:spLocks noGrp="1"/>
+          </p:cNvSpPr>
+          <p:nvPr/>
+        </p:nvSpPr>
+        <p:spPr>
+          <a:xfrm>
+            <a:off x="2880360" y="457200"/>
+            <a:ext cx="4572000" cy="274320"/>
+          </a:xfrm>
+          <a:prstGeom prst="rect">
+            <a:avLst/>
+          </a:prstGeom>
+        </p:spPr>
+        <p:txBody>
+          <a:bodyPr anchor="b"/>
+          <a:lstStyle/>
+          <a:p>
+            <a:pPr algn="r">
+              <a:defRPr sz="900">
                 <a:solidFill>
-                  <a:srgbClr val="C5D9C7"/>
+                  <a:srgbClr val="9AA7B6"/>
                 </a:solidFill>
-              </a:defRPr>
-            </a:pPr>
-            <a:r>
-              <a:t>Dr. BELACEL Madani</a:t>
-            </a:r>
-            <a:br/>
-            <a:r>
-              <a:t>Maître de Conférences B</a:t>
-            </a:r>
-            <a:br/>
-            <a:r>
-              <a:t>Université de Mostaganem</a:t>
-            </a:r>
-            <a:br/>
-            <a:r>
-              <a:t>madani.belacel@univ-mosta.dz</a:t>
+                <a:latin typeface="Poppins"/>
+              </a:defRPr>
+            </a:pPr>
+            <a:r>
+              <a:rPr lang="fr-FR" sz="900">
+                <a:solidFill>
+                  <a:srgbClr val="9AA7B6"/>
+                </a:solidFill>
+                <a:latin typeface="Poppins"/>
+              </a:rPr>
+              <a:t>Université de Mostaganem — Dr. Madani BELACEL</a:t>
             </a:r>
           </a:p>
         </p:txBody>
@@ -4129,9 +4344,7 @@
   <p:cSld>
     <p:bg>
       <p:bgPr>
-        <a:solidFill>
-          <a:srgbClr val="FFFFFF"/>
-        </a:solidFill>
+        <a:solidFill>val="FFFFFF"/&gt;</a:solidFill>
         <a:effectLst/>
       </p:bgPr>
     </p:bg>
@@ -4166,9 +4379,7 @@
           <a:p>
             <a:pPr algn="l">
               <a:defRPr sz="2600" b="1">
-                <a:solidFill>
-                  <a:srgbClr val="1A5C33"/>
-                </a:solidFill>
+                <a:solidFill>val="006847"/&gt;</a:solidFill>
               </a:defRPr>
             </a:pPr>
             <a:r>
@@ -4204,9 +4415,7 @@
                 <a:spcPts val="600"/>
               </a:spcAft>
               <a:defRPr sz="1500">
-                <a:solidFill>
-                  <a:srgbClr val="222222"/>
-                </a:solidFill>
+                <a:solidFill>val="22344A"/&gt;</a:solidFill>
               </a:defRPr>
             </a:pPr>
             <a:r>
@@ -4219,9 +4428,7 @@
                 <a:spcPts val="600"/>
               </a:spcAft>
               <a:defRPr sz="1500">
-                <a:solidFill>
-                  <a:srgbClr val="222222"/>
-                </a:solidFill>
+                <a:solidFill>val="22344A"/&gt;</a:solidFill>
               </a:defRPr>
             </a:pPr>
             <a:r>
@@ -4234,13 +4441,52 @@
                 <a:spcPts val="600"/>
               </a:spcAft>
               <a:defRPr sz="1500">
+                <a:solidFill>val="22344A"/&gt;</a:solidFill>
+              </a:defRPr>
+            </a:pPr>
+            <a:r>
+              <a:t>• Évaluer les technologies</a:t>
+            </a:r>
+          </a:p>
+        </p:txBody>
+      </p:sp>
+      <p:sp>
+        <p:nvSpPr>
+          <p:cNvPr id="990001" name="Pied de page FLE"/>
+          <p:cNvSpPr>
+            <a:spLocks noGrp="1"/>
+          </p:cNvSpPr>
+          <p:nvPr/>
+        </p:nvSpPr>
+        <p:spPr>
+          <a:xfrm>
+            <a:off x="2971800" y="182880"/>
+            <a:ext cx="4572000" cy="274320"/>
+          </a:xfrm>
+          <a:prstGeom prst="rect">
+            <a:avLst/>
+          </a:prstGeom>
+        </p:spPr>
+        <p:txBody>
+          <a:bodyPr anchor="b"/>
+          <a:lstStyle/>
+          <a:p>
+            <a:pPr algn="r">
+              <a:defRPr sz="900">
                 <a:solidFill>
-                  <a:srgbClr val="222222"/>
+                  <a:srgbClr val="9AA7B6"/>
                 </a:solidFill>
-              </a:defRPr>
-            </a:pPr>
-            <a:r>
-              <a:t>• Évaluer les technologies</a:t>
+                <a:latin typeface="Poppins"/>
+              </a:defRPr>
+            </a:pPr>
+            <a:r>
+              <a:rPr lang="fr-FR" sz="900">
+                <a:solidFill>
+                  <a:srgbClr val="9AA7B6"/>
+                </a:solidFill>
+                <a:latin typeface="Poppins"/>
+              </a:rPr>
+              <a:t>Université de Mostaganem — Dr. Madani BELACEL</a:t>
             </a:r>
           </a:p>
         </p:txBody>
@@ -4258,9 +4504,7 @@
   <p:cSld>
     <p:bg>
       <p:bgPr>
-        <a:solidFill>
-          <a:srgbClr val="FFFFFF"/>
-        </a:solidFill>
+        <a:solidFill>val="FFFFFF"/&gt;</a:solidFill>
         <a:effectLst/>
       </p:bgPr>
     </p:bg>
@@ -4295,9 +4539,7 @@
           <a:p>
             <a:pPr algn="l">
               <a:defRPr sz="2600" b="1">
-                <a:solidFill>
-                  <a:srgbClr val="1A5C33"/>
-                </a:solidFill>
+                <a:solidFill>val="006847"/&gt;</a:solidFill>
               </a:defRPr>
             </a:pPr>
             <a:r>
@@ -4333,9 +4575,7 @@
                 <a:spcPts val="600"/>
               </a:spcAft>
               <a:defRPr sz="1600">
-                <a:solidFill>
-                  <a:srgbClr val="222222"/>
-                </a:solidFill>
+                <a:solidFill>val="22344A"/&gt;</a:solidFill>
               </a:defRPr>
             </a:pPr>
             <a:r>
@@ -4348,9 +4588,7 @@
                 <a:spcPts val="600"/>
               </a:spcAft>
               <a:defRPr sz="1600">
-                <a:solidFill>
-                  <a:srgbClr val="222222"/>
-                </a:solidFill>
+                <a:solidFill>val="22344A"/&gt;</a:solidFill>
               </a:defRPr>
             </a:pPr>
             <a:r>
@@ -4363,9 +4601,7 @@
                 <a:spcPts val="600"/>
               </a:spcAft>
               <a:defRPr sz="1600">
-                <a:solidFill>
-                  <a:srgbClr val="222222"/>
-                </a:solidFill>
+                <a:solidFill>val="22344A"/&gt;</a:solidFill>
               </a:defRPr>
             </a:pPr>
             <a:r>
@@ -4378,9 +4614,7 @@
                 <a:spcPts val="600"/>
               </a:spcAft>
               <a:defRPr sz="1600">
-                <a:solidFill>
-                  <a:srgbClr val="222222"/>
-                </a:solidFill>
+                <a:solidFill>val="22344A"/&gt;</a:solidFill>
               </a:defRPr>
             </a:pPr>
             <a:r>
@@ -4393,9 +4627,7 @@
                 <a:spcPts val="600"/>
               </a:spcAft>
               <a:defRPr sz="1600">
-                <a:solidFill>
-                  <a:srgbClr val="222222"/>
-                </a:solidFill>
+                <a:solidFill>val="22344A"/&gt;</a:solidFill>
               </a:defRPr>
             </a:pPr>
             <a:r>
@@ -4408,9 +4640,7 @@
                 <a:spcPts val="600"/>
               </a:spcAft>
               <a:defRPr sz="1600">
-                <a:solidFill>
-                  <a:srgbClr val="222222"/>
-                </a:solidFill>
+                <a:solidFill>val="22344A"/&gt;</a:solidFill>
               </a:defRPr>
             </a:pPr>
             <a:r>
@@ -4423,9 +4653,7 @@
                 <a:spcPts val="600"/>
               </a:spcAft>
               <a:defRPr sz="1600">
-                <a:solidFill>
-                  <a:srgbClr val="222222"/>
-                </a:solidFill>
+                <a:solidFill>val="22344A"/&gt;</a:solidFill>
               </a:defRPr>
             </a:pPr>
             <a:r>
@@ -4438,9 +4666,7 @@
                 <a:spcPts val="600"/>
               </a:spcAft>
               <a:defRPr sz="1600">
-                <a:solidFill>
-                  <a:srgbClr val="222222"/>
-                </a:solidFill>
+                <a:solidFill>val="22344A"/&gt;</a:solidFill>
               </a:defRPr>
             </a:pPr>
             <a:r>
@@ -4453,9 +4679,7 @@
                 <a:spcPts val="600"/>
               </a:spcAft>
               <a:defRPr sz="1600">
-                <a:solidFill>
-                  <a:srgbClr val="222222"/>
-                </a:solidFill>
+                <a:solidFill>val="22344A"/&gt;</a:solidFill>
               </a:defRPr>
             </a:pPr>
             <a:r>
@@ -4468,13 +4692,52 @@
                 <a:spcPts val="600"/>
               </a:spcAft>
               <a:defRPr sz="1600">
+                <a:solidFill>val="22344A"/&gt;</a:solidFill>
+              </a:defRPr>
+            </a:pPr>
+            <a:r>
+              <a:t>• Exercice 5 — Bonnes pratiques(14 min)</a:t>
+            </a:r>
+          </a:p>
+        </p:txBody>
+      </p:sp>
+      <p:sp>
+        <p:nvSpPr>
+          <p:cNvPr id="990001" name="Pied de page FLE"/>
+          <p:cNvSpPr>
+            <a:spLocks noGrp="1"/>
+          </p:cNvSpPr>
+          <p:nvPr/>
+        </p:nvSpPr>
+        <p:spPr>
+          <a:xfrm>
+            <a:off x="2971800" y="182880"/>
+            <a:ext cx="4572000" cy="274320"/>
+          </a:xfrm>
+          <a:prstGeom prst="rect">
+            <a:avLst/>
+          </a:prstGeom>
+        </p:spPr>
+        <p:txBody>
+          <a:bodyPr anchor="b"/>
+          <a:lstStyle/>
+          <a:p>
+            <a:pPr algn="r">
+              <a:defRPr sz="900">
                 <a:solidFill>
-                  <a:srgbClr val="222222"/>
+                  <a:srgbClr val="9AA7B6"/>
                 </a:solidFill>
-              </a:defRPr>
-            </a:pPr>
-            <a:r>
-              <a:t>• Exercice 5 — Bonnes pratiques(14 min)</a:t>
+                <a:latin typeface="Poppins"/>
+              </a:defRPr>
+            </a:pPr>
+            <a:r>
+              <a:rPr lang="fr-FR" sz="900">
+                <a:solidFill>
+                  <a:srgbClr val="9AA7B6"/>
+                </a:solidFill>
+                <a:latin typeface="Poppins"/>
+              </a:rPr>
+              <a:t>Université de Mostaganem — Dr. Madani BELACEL</a:t>
             </a:r>
           </a:p>
         </p:txBody>
@@ -4492,9 +4755,7 @@
   <p:cSld>
     <p:bg>
       <p:bgPr>
-        <a:solidFill>
-          <a:srgbClr val="FFFFFF"/>
-        </a:solidFill>
+        <a:solidFill>val="FFFFFF"/&gt;</a:solidFill>
         <a:effectLst/>
       </p:bgPr>
     </p:bg>
@@ -4519,9 +4780,7 @@
           <a:prstGeom prst="rect">
             <a:avLst/>
           </a:prstGeom>
-          <a:solidFill>
-            <a:srgbClr val="2C6E49"/>
-          </a:solidFill>
+          <a:solidFill>val="00875B"/&gt;</a:solidFill>
           <a:ln>
             <a:noFill/>
           </a:ln>
@@ -4572,9 +4831,7 @@
           <a:p>
             <a:pPr algn="l">
               <a:defRPr sz="2200" b="1">
-                <a:solidFill>
-                  <a:srgbClr val="1A5C33"/>
-                </a:solidFill>
+                <a:solidFill>val="006847"/&gt;</a:solidFill>
               </a:defRPr>
             </a:pPr>
             <a:r>
@@ -4610,9 +4867,7 @@
                 <a:spcPts val="600"/>
               </a:spcAft>
               <a:defRPr sz="1400">
-                <a:solidFill>
-                  <a:srgbClr val="222222"/>
-                </a:solidFill>
+                <a:solidFill>val="22344A"/&gt;</a:solidFill>
               </a:defRPr>
             </a:pPr>
             <a:r>
@@ -4625,13 +4880,52 @@
                 <a:spcPts val="600"/>
               </a:spcAft>
               <a:defRPr sz="1400">
+                <a:solidFill>val="22344A"/&gt;</a:solidFill>
+              </a:defRPr>
+            </a:pPr>
+            <a:r>
+              <a:t>• Corrigé détaillé :Les TIC regroupent outils numériques de traitement, transmission et accès à l'information. L'UIT insiste sur la forme numérique et la convergence des technologies.</a:t>
+            </a:r>
+          </a:p>
+        </p:txBody>
+      </p:sp>
+      <p:sp>
+        <p:nvSpPr>
+          <p:cNvPr id="990001" name="Pied de page FLE"/>
+          <p:cNvSpPr>
+            <a:spLocks noGrp="1"/>
+          </p:cNvSpPr>
+          <p:nvPr/>
+        </p:nvSpPr>
+        <p:spPr>
+          <a:xfrm>
+            <a:off x="-228600" y="6400800"/>
+            <a:ext cx="109728" cy="274320"/>
+          </a:xfrm>
+          <a:prstGeom prst="rect">
+            <a:avLst/>
+          </a:prstGeom>
+        </p:spPr>
+        <p:txBody>
+          <a:bodyPr anchor="b"/>
+          <a:lstStyle/>
+          <a:p>
+            <a:pPr algn="r">
+              <a:defRPr sz="900">
                 <a:solidFill>
-                  <a:srgbClr val="222222"/>
+                  <a:srgbClr val="9AA7B6"/>
                 </a:solidFill>
-              </a:defRPr>
-            </a:pPr>
-            <a:r>
-              <a:t>• Corrigé détaillé :Les TIC regroupent outils numériques de traitement, transmission et accès à l'information. L'UIT insiste sur la forme numérique et la convergence des technologies.</a:t>
+                <a:latin typeface="Poppins"/>
+              </a:defRPr>
+            </a:pPr>
+            <a:r>
+              <a:rPr lang="fr-FR" sz="900">
+                <a:solidFill>
+                  <a:srgbClr val="9AA7B6"/>
+                </a:solidFill>
+                <a:latin typeface="Poppins"/>
+              </a:rPr>
+              <a:t>Université de Mostaganem — Dr. Madani BELACEL</a:t>
             </a:r>
           </a:p>
         </p:txBody>
@@ -4649,9 +4943,7 @@
   <p:cSld>
     <p:bg>
       <p:bgPr>
-        <a:solidFill>
-          <a:srgbClr val="FFFFFF"/>
-        </a:solidFill>
+        <a:solidFill>val="FFFFFF"/&gt;</a:solidFill>
         <a:effectLst/>
       </p:bgPr>
     </p:bg>
@@ -4676,9 +4968,7 @@
           <a:prstGeom prst="rect">
             <a:avLst/>
           </a:prstGeom>
-          <a:solidFill>
-            <a:srgbClr val="2C6E49"/>
-          </a:solidFill>
+          <a:solidFill>val="00875B"/&gt;</a:solidFill>
           <a:ln>
             <a:noFill/>
           </a:ln>
@@ -4729,9 +5019,7 @@
           <a:p>
             <a:pPr algn="l">
               <a:defRPr sz="2200" b="1">
-                <a:solidFill>
-                  <a:srgbClr val="1A5C33"/>
-                </a:solidFill>
+                <a:solidFill>val="006847"/&gt;</a:solidFill>
               </a:defRPr>
             </a:pPr>
             <a:r>
@@ -4767,9 +5055,7 @@
                 <a:spcPts val="600"/>
               </a:spcAft>
               <a:defRPr sz="1400">
-                <a:solidFill>
-                  <a:srgbClr val="222222"/>
-                </a:solidFill>
+                <a:solidFill>val="22344A"/&gt;</a:solidFill>
               </a:defRPr>
             </a:pPr>
             <a:r>
@@ -4782,13 +5068,52 @@
                 <a:spcPts val="600"/>
               </a:spcAft>
               <a:defRPr sz="1400">
+                <a:solidFill>val="22344A"/&gt;</a:solidFill>
+              </a:defRPr>
+            </a:pPr>
+            <a:r>
+              <a:t>• Corrigé détaillé :Technique = PC + Moodle ; Information = polycopié PDF ; Communication = email au professeur ou forum TD.</a:t>
+            </a:r>
+          </a:p>
+        </p:txBody>
+      </p:sp>
+      <p:sp>
+        <p:nvSpPr>
+          <p:cNvPr id="990001" name="Pied de page FLE"/>
+          <p:cNvSpPr>
+            <a:spLocks noGrp="1"/>
+          </p:cNvSpPr>
+          <p:nvPr/>
+        </p:nvSpPr>
+        <p:spPr>
+          <a:xfrm>
+            <a:off x="-228600" y="6400800"/>
+            <a:ext cx="109728" cy="274320"/>
+          </a:xfrm>
+          <a:prstGeom prst="rect">
+            <a:avLst/>
+          </a:prstGeom>
+        </p:spPr>
+        <p:txBody>
+          <a:bodyPr anchor="b"/>
+          <a:lstStyle/>
+          <a:p>
+            <a:pPr algn="r">
+              <a:defRPr sz="900">
                 <a:solidFill>
-                  <a:srgbClr val="222222"/>
+                  <a:srgbClr val="9AA7B6"/>
                 </a:solidFill>
-              </a:defRPr>
-            </a:pPr>
-            <a:r>
-              <a:t>• Corrigé détaillé :Technique = PC + Moodle ; Information = polycopié PDF ; Communication = email au professeur ou forum TD.</a:t>
+                <a:latin typeface="Poppins"/>
+              </a:defRPr>
+            </a:pPr>
+            <a:r>
+              <a:rPr lang="fr-FR" sz="900">
+                <a:solidFill>
+                  <a:srgbClr val="9AA7B6"/>
+                </a:solidFill>
+                <a:latin typeface="Poppins"/>
+              </a:rPr>
+              <a:t>Université de Mostaganem — Dr. Madani BELACEL</a:t>
             </a:r>
           </a:p>
         </p:txBody>
@@ -4806,9 +5131,7 @@
   <p:cSld>
     <p:bg>
       <p:bgPr>
-        <a:solidFill>
-          <a:srgbClr val="FFFFFF"/>
-        </a:solidFill>
+        <a:solidFill>val="FFFFFF"/&gt;</a:solidFill>
         <a:effectLst/>
       </p:bgPr>
     </p:bg>
@@ -4833,9 +5156,7 @@
           <a:prstGeom prst="rect">
             <a:avLst/>
           </a:prstGeom>
-          <a:solidFill>
-            <a:srgbClr val="2C6E49"/>
-          </a:solidFill>
+          <a:solidFill>val="00875B"/&gt;</a:solidFill>
           <a:ln>
             <a:noFill/>
           </a:ln>
@@ -4886,9 +5207,7 @@
           <a:p>
             <a:pPr algn="l">
               <a:defRPr sz="2200" b="1">
-                <a:solidFill>
-                  <a:srgbClr val="1A5C33"/>
-                </a:solidFill>
+                <a:solidFill>val="006847"/&gt;</a:solidFill>
               </a:defRPr>
             </a:pPr>
             <a:r>
@@ -4924,9 +5243,7 @@
                 <a:spcPts val="600"/>
               </a:spcAft>
               <a:defRPr sz="1400">
-                <a:solidFill>
-                  <a:srgbClr val="222222"/>
-                </a:solidFill>
+                <a:solidFill>val="22344A"/&gt;</a:solidFill>
               </a:defRPr>
             </a:pPr>
             <a:r>
@@ -4943,13 +5260,52 @@
                 <a:spcPts val="600"/>
               </a:spcAft>
               <a:defRPr sz="1400">
+                <a:solidFill>val="22344A"/&gt;</a:solidFill>
+              </a:defRPr>
+            </a:pPr>
+            <a:r>
+              <a:t>• Corrigé détaillé :Word → traitement ; email et Teams → transmission ; USB → sauvegarde ; impression → traitement/sortie.</a:t>
+            </a:r>
+          </a:p>
+        </p:txBody>
+      </p:sp>
+      <p:sp>
+        <p:nvSpPr>
+          <p:cNvPr id="990001" name="Pied de page FLE"/>
+          <p:cNvSpPr>
+            <a:spLocks noGrp="1"/>
+          </p:cNvSpPr>
+          <p:nvPr/>
+        </p:nvSpPr>
+        <p:spPr>
+          <a:xfrm>
+            <a:off x="-228600" y="6400800"/>
+            <a:ext cx="109728" cy="274320"/>
+          </a:xfrm>
+          <a:prstGeom prst="rect">
+            <a:avLst/>
+          </a:prstGeom>
+        </p:spPr>
+        <p:txBody>
+          <a:bodyPr anchor="b"/>
+          <a:lstStyle/>
+          <a:p>
+            <a:pPr algn="r">
+              <a:defRPr sz="900">
                 <a:solidFill>
-                  <a:srgbClr val="222222"/>
+                  <a:srgbClr val="9AA7B6"/>
                 </a:solidFill>
-              </a:defRPr>
-            </a:pPr>
-            <a:r>
-              <a:t>• Corrigé détaillé :Word → traitement ; email et Teams → transmission ; USB → sauvegarde ; impression → traitement/sortie.</a:t>
+                <a:latin typeface="Poppins"/>
+              </a:defRPr>
+            </a:pPr>
+            <a:r>
+              <a:rPr lang="fr-FR" sz="900">
+                <a:solidFill>
+                  <a:srgbClr val="9AA7B6"/>
+                </a:solidFill>
+                <a:latin typeface="Poppins"/>
+              </a:rPr>
+              <a:t>Université de Mostaganem — Dr. Madani BELACEL</a:t>
             </a:r>
           </a:p>
         </p:txBody>
@@ -4967,9 +5323,7 @@
   <p:cSld>
     <p:bg>
       <p:bgPr>
-        <a:solidFill>
-          <a:srgbClr val="FFFFFF"/>
-        </a:solidFill>
+        <a:solidFill>val="FFFFFF"/&gt;</a:solidFill>
         <a:effectLst/>
       </p:bgPr>
     </p:bg>
@@ -4994,9 +5348,7 @@
           <a:prstGeom prst="rect">
             <a:avLst/>
           </a:prstGeom>
-          <a:solidFill>
-            <a:srgbClr val="2C6E49"/>
-          </a:solidFill>
+          <a:solidFill>val="00875B"/&gt;</a:solidFill>
           <a:ln>
             <a:noFill/>
           </a:ln>
@@ -5047,9 +5399,7 @@
           <a:p>
             <a:pPr algn="l">
               <a:defRPr sz="2200" b="1">
-                <a:solidFill>
-                  <a:srgbClr val="1A5C33"/>
-                </a:solidFill>
+                <a:solidFill>val="006847"/&gt;</a:solidFill>
               </a:defRPr>
             </a:pPr>
             <a:r>
@@ -5085,9 +5435,7 @@
                 <a:spcPts val="600"/>
               </a:spcAft>
               <a:defRPr sz="1400">
-                <a:solidFill>
-                  <a:srgbClr val="222222"/>
-                </a:solidFill>
+                <a:solidFill>val="22344A"/&gt;</a:solidFill>
               </a:defRPr>
             </a:pPr>
             <a:r>
@@ -5100,13 +5448,52 @@
                 <a:spcPts val="600"/>
               </a:spcAft>
               <a:defRPr sz="1400">
+                <a:solidFill>val="22344A"/&gt;</a:solidFill>
+              </a:defRPr>
+            </a:pPr>
+            <a:r>
+              <a:t>• Corrigé détaillé :Corpus multilingues en ligne, visio avec locuteurs natifs, Moodle pour devoirs, bibliothèque numérique, PowerPoint pour exposés.</a:t>
+            </a:r>
+          </a:p>
+        </p:txBody>
+      </p:sp>
+      <p:sp>
+        <p:nvSpPr>
+          <p:cNvPr id="990001" name="Pied de page FLE"/>
+          <p:cNvSpPr>
+            <a:spLocks noGrp="1"/>
+          </p:cNvSpPr>
+          <p:nvPr/>
+        </p:nvSpPr>
+        <p:spPr>
+          <a:xfrm>
+            <a:off x="-228600" y="6400800"/>
+            <a:ext cx="109728" cy="274320"/>
+          </a:xfrm>
+          <a:prstGeom prst="rect">
+            <a:avLst/>
+          </a:prstGeom>
+        </p:spPr>
+        <p:txBody>
+          <a:bodyPr anchor="b"/>
+          <a:lstStyle/>
+          <a:p>
+            <a:pPr algn="r">
+              <a:defRPr sz="900">
                 <a:solidFill>
-                  <a:srgbClr val="222222"/>
+                  <a:srgbClr val="9AA7B6"/>
                 </a:solidFill>
-              </a:defRPr>
-            </a:pPr>
-            <a:r>
-              <a:t>• Corrigé détaillé :Corpus multilingues en ligne, visio avec locuteurs natifs, Moodle pour devoirs, bibliothèque numérique, PowerPoint pour exposés.</a:t>
+                <a:latin typeface="Poppins"/>
+              </a:defRPr>
+            </a:pPr>
+            <a:r>
+              <a:rPr lang="fr-FR" sz="900">
+                <a:solidFill>
+                  <a:srgbClr val="9AA7B6"/>
+                </a:solidFill>
+                <a:latin typeface="Poppins"/>
+              </a:rPr>
+              <a:t>Université de Mostaganem — Dr. Madani BELACEL</a:t>
             </a:r>
           </a:p>
         </p:txBody>
@@ -5124,9 +5511,7 @@
   <p:cSld>
     <p:bg>
       <p:bgPr>
-        <a:solidFill>
-          <a:srgbClr val="FFFFFF"/>
-        </a:solidFill>
+        <a:solidFill>val="FFFFFF"/&gt;</a:solidFill>
         <a:effectLst/>
       </p:bgPr>
     </p:bg>
@@ -5151,9 +5536,7 @@
           <a:prstGeom prst="rect">
             <a:avLst/>
           </a:prstGeom>
-          <a:solidFill>
-            <a:srgbClr val="2C6E49"/>
-          </a:solidFill>
+          <a:solidFill>val="00875B"/&gt;</a:solidFill>
           <a:ln>
             <a:noFill/>
           </a:ln>
@@ -5204,9 +5587,7 @@
           <a:p>
             <a:pPr algn="l">
               <a:defRPr sz="2200" b="1">
-                <a:solidFill>
-                  <a:srgbClr val="1A5C33"/>
-                </a:solidFill>
+                <a:solidFill>val="006847"/&gt;</a:solidFill>
               </a:defRPr>
             </a:pPr>
             <a:r>
@@ -5242,9 +5623,7 @@
                 <a:spcPts val="600"/>
               </a:spcAft>
               <a:defRPr sz="1400">
-                <a:solidFill>
-                  <a:srgbClr val="222222"/>
-                </a:solidFill>
+                <a:solidFill>val="22344A"/&gt;</a:solidFill>
               </a:defRPr>
             </a:pPr>
             <a:r>
@@ -5257,13 +5636,52 @@
                 <a:spcPts val="600"/>
               </a:spcAft>
               <a:defRPr sz="1400">
+                <a:solidFill>val="22344A"/&gt;</a:solidFill>
+              </a:defRPr>
+            </a:pPr>
+            <a:r>
+              <a:t>• Corrigé détaillé :Opportunités : ressources mondiales, MOOC, collaboration. Risques : plagiat, désinformation, addiction, vie privée. Posture : esprit critique et éthique académique.</a:t>
+            </a:r>
+          </a:p>
+        </p:txBody>
+      </p:sp>
+      <p:sp>
+        <p:nvSpPr>
+          <p:cNvPr id="990001" name="Pied de page FLE"/>
+          <p:cNvSpPr>
+            <a:spLocks noGrp="1"/>
+          </p:cNvSpPr>
+          <p:nvPr/>
+        </p:nvSpPr>
+        <p:spPr>
+          <a:xfrm>
+            <a:off x="-228600" y="6400800"/>
+            <a:ext cx="109728" cy="274320"/>
+          </a:xfrm>
+          <a:prstGeom prst="rect">
+            <a:avLst/>
+          </a:prstGeom>
+        </p:spPr>
+        <p:txBody>
+          <a:bodyPr anchor="b"/>
+          <a:lstStyle/>
+          <a:p>
+            <a:pPr algn="r">
+              <a:defRPr sz="900">
                 <a:solidFill>
-                  <a:srgbClr val="222222"/>
+                  <a:srgbClr val="9AA7B6"/>
                 </a:solidFill>
-              </a:defRPr>
-            </a:pPr>
-            <a:r>
-              <a:t>• Corrigé détaillé :Opportunités : ressources mondiales, MOOC, collaboration. Risques : plagiat, désinformation, addiction, vie privée. Posture : esprit critique et éthique académique.</a:t>
+                <a:latin typeface="Poppins"/>
+              </a:defRPr>
+            </a:pPr>
+            <a:r>
+              <a:rPr lang="fr-FR" sz="900">
+                <a:solidFill>
+                  <a:srgbClr val="9AA7B6"/>
+                </a:solidFill>
+                <a:latin typeface="Poppins"/>
+              </a:rPr>
+              <a:t>Université de Mostaganem — Dr. Madani BELACEL</a:t>
             </a:r>
           </a:p>
         </p:txBody>
@@ -5281,9 +5699,7 @@
   <p:cSld>
     <p:bg>
       <p:bgPr>
-        <a:solidFill>
-          <a:srgbClr val="FFFFFF"/>
-        </a:solidFill>
+        <a:solidFill>val="FFFFFF"/&gt;</a:solidFill>
         <a:effectLst/>
       </p:bgPr>
     </p:bg>
@@ -5308,9 +5724,7 @@
           <a:prstGeom prst="rect">
             <a:avLst/>
           </a:prstGeom>
-          <a:solidFill>
-            <a:srgbClr val="2C6E49"/>
-          </a:solidFill>
+          <a:solidFill>val="00875B"/&gt;</a:solidFill>
           <a:ln>
             <a:noFill/>
           </a:ln>
@@ -5361,9 +5775,7 @@
           <a:p>
             <a:pPr algn="l">
               <a:defRPr sz="2200" b="1">
-                <a:solidFill>
-                  <a:srgbClr val="1A5C33"/>
-                </a:solidFill>
+                <a:solidFill>val="006847"/&gt;</a:solidFill>
               </a:defRPr>
             </a:pPr>
             <a:r>
@@ -5399,9 +5811,7 @@
                 <a:spcPts val="600"/>
               </a:spcAft>
               <a:defRPr sz="1400">
-                <a:solidFill>
-                  <a:srgbClr val="222222"/>
-                </a:solidFill>
+                <a:solidFill>val="22344A"/&gt;</a:solidFill>
               </a:defRPr>
             </a:pPr>
             <a:r>
@@ -5414,13 +5824,52 @@
                 <a:spcPts val="600"/>
               </a:spcAft>
               <a:defRPr sz="1400">
+                <a:solidFill>val="22344A"/&gt;</a:solidFill>
+              </a:defRPr>
+            </a:pPr>
+            <a:r>
+              <a:t>• Corrigé :Informatique = traitement automatique de l'information ; hardware = matériel ; software = logiciels ; CPU = processeur ; RAM = mémoire vive volatile ; SSD = stockage rapide non volatile.</a:t>
+            </a:r>
+          </a:p>
+        </p:txBody>
+      </p:sp>
+      <p:sp>
+        <p:nvSpPr>
+          <p:cNvPr id="990001" name="Pied de page FLE"/>
+          <p:cNvSpPr>
+            <a:spLocks noGrp="1"/>
+          </p:cNvSpPr>
+          <p:nvPr/>
+        </p:nvSpPr>
+        <p:spPr>
+          <a:xfrm>
+            <a:off x="-228600" y="6400800"/>
+            <a:ext cx="109728" cy="274320"/>
+          </a:xfrm>
+          <a:prstGeom prst="rect">
+            <a:avLst/>
+          </a:prstGeom>
+        </p:spPr>
+        <p:txBody>
+          <a:bodyPr anchor="b"/>
+          <a:lstStyle/>
+          <a:p>
+            <a:pPr algn="r">
+              <a:defRPr sz="900">
                 <a:solidFill>
-                  <a:srgbClr val="222222"/>
+                  <a:srgbClr val="9AA7B6"/>
                 </a:solidFill>
-              </a:defRPr>
-            </a:pPr>
-            <a:r>
-              <a:t>• Corrigé :Informatique = traitement automatique de l'information ; hardware = matériel ; software = logiciels ; CPU = processeur ; RAM = mémoire vive volatile ; SSD = stockage rapide non volatile.</a:t>
+                <a:latin typeface="Poppins"/>
+              </a:defRPr>
+            </a:pPr>
+            <a:r>
+              <a:rPr lang="fr-FR" sz="900">
+                <a:solidFill>
+                  <a:srgbClr val="9AA7B6"/>
+                </a:solidFill>
+                <a:latin typeface="Poppins"/>
+              </a:rPr>
+              <a:t>Université de Mostaganem — Dr. Madani BELACEL</a:t>
             </a:r>
           </a:p>
         </p:txBody>
@@ -5476,7 +5925,7 @@
     </a:clrScheme>
     <a:fontScheme name="Office">
       <a:majorFont>
-        <a:latin typeface="Calibri"/>
+        <a:latin typeface="Poppins"/>
         <a:ea typeface=""/>
         <a:cs typeface=""/>
         <a:font script="Jpan" typeface="ＭＳ Ｐゴシック"/>
@@ -5511,7 +5960,7 @@
         <a:font script="Geor" typeface="Sylfaen"/>
       </a:majorFont>
       <a:minorFont>
-        <a:latin typeface="Calibri"/>
+        <a:latin typeface="Poppins"/>
         <a:ea typeface=""/>
         <a:cs typeface=""/>
         <a:font script="Jpan" typeface="ＭＳ Ｐゴシック"/>
